--- a/项目文档/答辩PPT/HAJIMI-答辩PPT.pptx
+++ b/项目文档/答辩PPT/HAJIMI-答辩PPT.pptx
@@ -1,25 +1,25 @@
 
 <file path=ppt/presentation.xml><?xml version="1.0" encoding="utf-8"?>
-<p:presentation xmlns:a="http://schemas.openxmlformats.org/drawingml/2006/main" xmlns:r="http://schemas.openxmlformats.org/officeDocument/2006/relationships" xmlns:p="http://schemas.openxmlformats.org/presentationml/2006/main" saveSubsetFonts="1" autoCompressPictures="0">
+<p:presentation xmlns:a="http://schemas.openxmlformats.org/drawingml/2006/main" xmlns:r="http://schemas.openxmlformats.org/officeDocument/2006/relationships" xmlns:p="http://schemas.openxmlformats.org/presentationml/2006/main" autoCompressPictures="0">
   <p:sldMasterIdLst>
     <p:sldMasterId id="2147483648" r:id="rId1"/>
   </p:sldMasterIdLst>
   <p:sldIdLst>
-    <p:sldId id="256" r:id="rId7"/>
-    <p:sldId id="257" r:id="rId8"/>
-    <p:sldId id="258" r:id="rId9"/>
-    <p:sldId id="259" r:id="rId10"/>
-    <p:sldId id="260" r:id="rId11"/>
-    <p:sldId id="261" r:id="rId12"/>
-    <p:sldId id="262" r:id="rId13"/>
-    <p:sldId id="263" r:id="rId14"/>
-    <p:sldId id="264" r:id="rId15"/>
-    <p:sldId id="265" r:id="rId16"/>
-    <p:sldId id="266" r:id="rId17"/>
-    <p:sldId id="267" r:id="rId18"/>
-    <p:sldId id="268" r:id="rId19"/>
+    <p:sldId id="256" r:id="rId3"/>
+    <p:sldId id="257" r:id="rId4"/>
+    <p:sldId id="258" r:id="rId5"/>
+    <p:sldId id="259" r:id="rId6"/>
+    <p:sldId id="260" r:id="rId7"/>
+    <p:sldId id="261" r:id="rId8"/>
+    <p:sldId id="262" r:id="rId9"/>
+    <p:sldId id="263" r:id="rId10"/>
+    <p:sldId id="264" r:id="rId11"/>
+    <p:sldId id="265" r:id="rId12"/>
+    <p:sldId id="266" r:id="rId13"/>
+    <p:sldId id="267" r:id="rId14"/>
+    <p:sldId id="268" r:id="rId15"/>
   </p:sldIdLst>
-  <p:sldSz cx="12191695" cy="6858000" type="screen4x3"/>
+  <p:sldSz cx="12191365" cy="6858000" type="screen4x3"/>
   <p:notesSz cx="6858000" cy="9144000"/>
   <p:defaultTextStyle>
     <a:defPPr>
@@ -116,6 +116,22 @@
       </a:defRPr>
     </a:lvl9pPr>
   </p:defaultTextStyle>
+  <p:extLst>
+    <p:ext uri="{EFAFB233-063F-42B5-8137-9DF3F51BA10A}">
+      <p15:sldGuideLst xmlns:p15="http://schemas.microsoft.com/office/powerpoint/2012/main">
+        <p15:guide id="1" orient="horz" pos="2160" userDrawn="1">
+          <p15:clr>
+            <a:srgbClr val="A4A3A4"/>
+          </p15:clr>
+        </p15:guide>
+        <p15:guide id="2" pos="2880" userDrawn="1">
+          <p15:clr>
+            <a:srgbClr val="A4A3A4"/>
+          </p15:clr>
+        </p15:guide>
+      </p15:sldGuideLst>
+    </p:ext>
+  </p:extLst>
 </p:presentation>
 </file>
 
@@ -300,7 +316,6 @@
           <a:p>
             <a:fld id="{5BCAD085-E8A6-8845-BD4E-CB4CCA059FC4}" type="datetimeFigureOut">
               <a:rPr lang="en-US" smtClean="0"/>
-              <a:t>1/27/13</a:t>
             </a:fld>
             <a:endParaRPr lang="en-US"/>
           </a:p>
@@ -342,18 +357,12 @@
           <a:p>
             <a:fld id="{C1FF6DA9-008F-8B48-92A6-B652298478BF}" type="slidenum">
               <a:rPr lang="en-US" smtClean="0"/>
-              <a:t>‹#›</a:t>
             </a:fld>
             <a:endParaRPr lang="en-US"/>
           </a:p>
         </p:txBody>
       </p:sp>
     </p:spTree>
-    <p:extLst>
-      <p:ext uri="{BB962C8B-B14F-4D97-AF65-F5344CB8AC3E}">
-        <p14:creationId xmlns:p14="http://schemas.microsoft.com/office/powerpoint/2010/main" val="3168075583"/>
-      </p:ext>
-    </p:extLst>
   </p:cSld>
   <p:clrMapOvr>
     <a:masterClrMapping/>
@@ -421,6 +430,7 @@
               <a:rPr lang="en-US" smtClean="0"/>
               <a:t>Click to edit Master text styles</a:t>
             </a:r>
+            <a:endParaRPr lang="en-US" smtClean="0"/>
           </a:p>
           <a:p>
             <a:pPr lvl="1"/>
@@ -428,6 +438,7 @@
               <a:rPr lang="en-US" smtClean="0"/>
               <a:t>Second level</a:t>
             </a:r>
+            <a:endParaRPr lang="en-US" smtClean="0"/>
           </a:p>
           <a:p>
             <a:pPr lvl="2"/>
@@ -435,6 +446,7 @@
               <a:rPr lang="en-US" smtClean="0"/>
               <a:t>Third level</a:t>
             </a:r>
+            <a:endParaRPr lang="en-US" smtClean="0"/>
           </a:p>
           <a:p>
             <a:pPr lvl="3"/>
@@ -442,6 +454,7 @@
               <a:rPr lang="en-US" smtClean="0"/>
               <a:t>Fourth level</a:t>
             </a:r>
+            <a:endParaRPr lang="en-US" smtClean="0"/>
           </a:p>
           <a:p>
             <a:pPr lvl="4"/>
@@ -470,7 +483,6 @@
           <a:p>
             <a:fld id="{5BCAD085-E8A6-8845-BD4E-CB4CCA059FC4}" type="datetimeFigureOut">
               <a:rPr lang="en-US" smtClean="0"/>
-              <a:t>1/27/13</a:t>
             </a:fld>
             <a:endParaRPr lang="en-US"/>
           </a:p>
@@ -512,18 +524,12 @@
           <a:p>
             <a:fld id="{C1FF6DA9-008F-8B48-92A6-B652298478BF}" type="slidenum">
               <a:rPr lang="en-US" smtClean="0"/>
-              <a:t>‹#›</a:t>
             </a:fld>
             <a:endParaRPr lang="en-US"/>
           </a:p>
         </p:txBody>
       </p:sp>
     </p:spTree>
-    <p:extLst>
-      <p:ext uri="{BB962C8B-B14F-4D97-AF65-F5344CB8AC3E}">
-        <p14:creationId xmlns:p14="http://schemas.microsoft.com/office/powerpoint/2010/main" val="2910927964"/>
-      </p:ext>
-    </p:extLst>
   </p:cSld>
   <p:clrMapOvr>
     <a:masterClrMapping/>
@@ -601,6 +607,7 @@
               <a:rPr lang="en-US" smtClean="0"/>
               <a:t>Click to edit Master text styles</a:t>
             </a:r>
+            <a:endParaRPr lang="en-US" smtClean="0"/>
           </a:p>
           <a:p>
             <a:pPr lvl="1"/>
@@ -608,6 +615,7 @@
               <a:rPr lang="en-US" smtClean="0"/>
               <a:t>Second level</a:t>
             </a:r>
+            <a:endParaRPr lang="en-US" smtClean="0"/>
           </a:p>
           <a:p>
             <a:pPr lvl="2"/>
@@ -615,6 +623,7 @@
               <a:rPr lang="en-US" smtClean="0"/>
               <a:t>Third level</a:t>
             </a:r>
+            <a:endParaRPr lang="en-US" smtClean="0"/>
           </a:p>
           <a:p>
             <a:pPr lvl="3"/>
@@ -622,6 +631,7 @@
               <a:rPr lang="en-US" smtClean="0"/>
               <a:t>Fourth level</a:t>
             </a:r>
+            <a:endParaRPr lang="en-US" smtClean="0"/>
           </a:p>
           <a:p>
             <a:pPr lvl="4"/>
@@ -650,7 +660,6 @@
           <a:p>
             <a:fld id="{5BCAD085-E8A6-8845-BD4E-CB4CCA059FC4}" type="datetimeFigureOut">
               <a:rPr lang="en-US" smtClean="0"/>
-              <a:t>1/27/13</a:t>
             </a:fld>
             <a:endParaRPr lang="en-US"/>
           </a:p>
@@ -692,18 +701,12 @@
           <a:p>
             <a:fld id="{C1FF6DA9-008F-8B48-92A6-B652298478BF}" type="slidenum">
               <a:rPr lang="en-US" smtClean="0"/>
-              <a:t>‹#›</a:t>
             </a:fld>
             <a:endParaRPr lang="en-US"/>
           </a:p>
         </p:txBody>
       </p:sp>
     </p:spTree>
-    <p:extLst>
-      <p:ext uri="{BB962C8B-B14F-4D97-AF65-F5344CB8AC3E}">
-        <p14:creationId xmlns:p14="http://schemas.microsoft.com/office/powerpoint/2010/main" val="3612223792"/>
-      </p:ext>
-    </p:extLst>
   </p:cSld>
   <p:clrMapOvr>
     <a:masterClrMapping/>
@@ -771,6 +774,7 @@
               <a:rPr lang="en-US" smtClean="0"/>
               <a:t>Click to edit Master text styles</a:t>
             </a:r>
+            <a:endParaRPr lang="en-US" smtClean="0"/>
           </a:p>
           <a:p>
             <a:pPr lvl="1"/>
@@ -778,6 +782,7 @@
               <a:rPr lang="en-US" smtClean="0"/>
               <a:t>Second level</a:t>
             </a:r>
+            <a:endParaRPr lang="en-US" smtClean="0"/>
           </a:p>
           <a:p>
             <a:pPr lvl="2"/>
@@ -785,6 +790,7 @@
               <a:rPr lang="en-US" smtClean="0"/>
               <a:t>Third level</a:t>
             </a:r>
+            <a:endParaRPr lang="en-US" smtClean="0"/>
           </a:p>
           <a:p>
             <a:pPr lvl="3"/>
@@ -792,6 +798,7 @@
               <a:rPr lang="en-US" smtClean="0"/>
               <a:t>Fourth level</a:t>
             </a:r>
+            <a:endParaRPr lang="en-US" smtClean="0"/>
           </a:p>
           <a:p>
             <a:pPr lvl="4"/>
@@ -820,7 +827,6 @@
           <a:p>
             <a:fld id="{5BCAD085-E8A6-8845-BD4E-CB4CCA059FC4}" type="datetimeFigureOut">
               <a:rPr lang="en-US" smtClean="0"/>
-              <a:t>1/27/13</a:t>
             </a:fld>
             <a:endParaRPr lang="en-US"/>
           </a:p>
@@ -862,18 +868,12 @@
           <a:p>
             <a:fld id="{C1FF6DA9-008F-8B48-92A6-B652298478BF}" type="slidenum">
               <a:rPr lang="en-US" smtClean="0"/>
-              <a:t>‹#›</a:t>
             </a:fld>
             <a:endParaRPr lang="en-US"/>
           </a:p>
         </p:txBody>
       </p:sp>
     </p:spTree>
-    <p:extLst>
-      <p:ext uri="{BB962C8B-B14F-4D97-AF65-F5344CB8AC3E}">
-        <p14:creationId xmlns:p14="http://schemas.microsoft.com/office/powerpoint/2010/main" val="2614314258"/>
-      </p:ext>
-    </p:extLst>
   </p:cSld>
   <p:clrMapOvr>
     <a:masterClrMapping/>
@@ -1046,6 +1046,7 @@
               <a:rPr lang="en-US" smtClean="0"/>
               <a:t>Click to edit Master text styles</a:t>
             </a:r>
+            <a:endParaRPr lang="en-US" smtClean="0"/>
           </a:p>
         </p:txBody>
       </p:sp>
@@ -1066,7 +1067,6 @@
           <a:p>
             <a:fld id="{5BCAD085-E8A6-8845-BD4E-CB4CCA059FC4}" type="datetimeFigureOut">
               <a:rPr lang="en-US" smtClean="0"/>
-              <a:t>1/27/13</a:t>
             </a:fld>
             <a:endParaRPr lang="en-US"/>
           </a:p>
@@ -1108,18 +1108,12 @@
           <a:p>
             <a:fld id="{C1FF6DA9-008F-8B48-92A6-B652298478BF}" type="slidenum">
               <a:rPr lang="en-US" smtClean="0"/>
-              <a:t>‹#›</a:t>
             </a:fld>
             <a:endParaRPr lang="en-US"/>
           </a:p>
         </p:txBody>
       </p:sp>
     </p:spTree>
-    <p:extLst>
-      <p:ext uri="{BB962C8B-B14F-4D97-AF65-F5344CB8AC3E}">
-        <p14:creationId xmlns:p14="http://schemas.microsoft.com/office/powerpoint/2010/main" val="960648375"/>
-      </p:ext>
-    </p:extLst>
   </p:cSld>
   <p:clrMapOvr>
     <a:masterClrMapping/>
@@ -1220,6 +1214,7 @@
               <a:rPr lang="en-US" smtClean="0"/>
               <a:t>Click to edit Master text styles</a:t>
             </a:r>
+            <a:endParaRPr lang="en-US" smtClean="0"/>
           </a:p>
           <a:p>
             <a:pPr lvl="1"/>
@@ -1227,6 +1222,7 @@
               <a:rPr lang="en-US" smtClean="0"/>
               <a:t>Second level</a:t>
             </a:r>
+            <a:endParaRPr lang="en-US" smtClean="0"/>
           </a:p>
           <a:p>
             <a:pPr lvl="2"/>
@@ -1234,6 +1230,7 @@
               <a:rPr lang="en-US" smtClean="0"/>
               <a:t>Third level</a:t>
             </a:r>
+            <a:endParaRPr lang="en-US" smtClean="0"/>
           </a:p>
           <a:p>
             <a:pPr lvl="3"/>
@@ -1241,6 +1238,7 @@
               <a:rPr lang="en-US" smtClean="0"/>
               <a:t>Fourth level</a:t>
             </a:r>
+            <a:endParaRPr lang="en-US" smtClean="0"/>
           </a:p>
           <a:p>
             <a:pPr lvl="4"/>
@@ -1305,6 +1303,7 @@
               <a:rPr lang="en-US" smtClean="0"/>
               <a:t>Click to edit Master text styles</a:t>
             </a:r>
+            <a:endParaRPr lang="en-US" smtClean="0"/>
           </a:p>
           <a:p>
             <a:pPr lvl="1"/>
@@ -1312,6 +1311,7 @@
               <a:rPr lang="en-US" smtClean="0"/>
               <a:t>Second level</a:t>
             </a:r>
+            <a:endParaRPr lang="en-US" smtClean="0"/>
           </a:p>
           <a:p>
             <a:pPr lvl="2"/>
@@ -1319,6 +1319,7 @@
               <a:rPr lang="en-US" smtClean="0"/>
               <a:t>Third level</a:t>
             </a:r>
+            <a:endParaRPr lang="en-US" smtClean="0"/>
           </a:p>
           <a:p>
             <a:pPr lvl="3"/>
@@ -1326,6 +1327,7 @@
               <a:rPr lang="en-US" smtClean="0"/>
               <a:t>Fourth level</a:t>
             </a:r>
+            <a:endParaRPr lang="en-US" smtClean="0"/>
           </a:p>
           <a:p>
             <a:pPr lvl="4"/>
@@ -1354,7 +1356,6 @@
           <a:p>
             <a:fld id="{5BCAD085-E8A6-8845-BD4E-CB4CCA059FC4}" type="datetimeFigureOut">
               <a:rPr lang="en-US" smtClean="0"/>
-              <a:t>1/27/13</a:t>
             </a:fld>
             <a:endParaRPr lang="en-US"/>
           </a:p>
@@ -1396,18 +1397,12 @@
           <a:p>
             <a:fld id="{C1FF6DA9-008F-8B48-92A6-B652298478BF}" type="slidenum">
               <a:rPr lang="en-US" smtClean="0"/>
-              <a:t>‹#›</a:t>
             </a:fld>
             <a:endParaRPr lang="en-US"/>
           </a:p>
         </p:txBody>
       </p:sp>
     </p:spTree>
-    <p:extLst>
-      <p:ext uri="{BB962C8B-B14F-4D97-AF65-F5344CB8AC3E}">
-        <p14:creationId xmlns:p14="http://schemas.microsoft.com/office/powerpoint/2010/main" val="2782244947"/>
-      </p:ext>
-    </p:extLst>
   </p:cSld>
   <p:clrMapOvr>
     <a:masterClrMapping/>
@@ -1521,6 +1516,7 @@
               <a:rPr lang="en-US" smtClean="0"/>
               <a:t>Click to edit Master text styles</a:t>
             </a:r>
+            <a:endParaRPr lang="en-US" smtClean="0"/>
           </a:p>
         </p:txBody>
       </p:sp>
@@ -1577,6 +1573,7 @@
               <a:rPr lang="en-US" smtClean="0"/>
               <a:t>Click to edit Master text styles</a:t>
             </a:r>
+            <a:endParaRPr lang="en-US" smtClean="0"/>
           </a:p>
           <a:p>
             <a:pPr lvl="1"/>
@@ -1584,6 +1581,7 @@
               <a:rPr lang="en-US" smtClean="0"/>
               <a:t>Second level</a:t>
             </a:r>
+            <a:endParaRPr lang="en-US" smtClean="0"/>
           </a:p>
           <a:p>
             <a:pPr lvl="2"/>
@@ -1591,6 +1589,7 @@
               <a:rPr lang="en-US" smtClean="0"/>
               <a:t>Third level</a:t>
             </a:r>
+            <a:endParaRPr lang="en-US" smtClean="0"/>
           </a:p>
           <a:p>
             <a:pPr lvl="3"/>
@@ -1598,6 +1597,7 @@
               <a:rPr lang="en-US" smtClean="0"/>
               <a:t>Fourth level</a:t>
             </a:r>
+            <a:endParaRPr lang="en-US" smtClean="0"/>
           </a:p>
           <a:p>
             <a:pPr lvl="4"/>
@@ -1671,6 +1671,7 @@
               <a:rPr lang="en-US" smtClean="0"/>
               <a:t>Click to edit Master text styles</a:t>
             </a:r>
+            <a:endParaRPr lang="en-US" smtClean="0"/>
           </a:p>
         </p:txBody>
       </p:sp>
@@ -1727,6 +1728,7 @@
               <a:rPr lang="en-US" smtClean="0"/>
               <a:t>Click to edit Master text styles</a:t>
             </a:r>
+            <a:endParaRPr lang="en-US" smtClean="0"/>
           </a:p>
           <a:p>
             <a:pPr lvl="1"/>
@@ -1734,6 +1736,7 @@
               <a:rPr lang="en-US" smtClean="0"/>
               <a:t>Second level</a:t>
             </a:r>
+            <a:endParaRPr lang="en-US" smtClean="0"/>
           </a:p>
           <a:p>
             <a:pPr lvl="2"/>
@@ -1741,6 +1744,7 @@
               <a:rPr lang="en-US" smtClean="0"/>
               <a:t>Third level</a:t>
             </a:r>
+            <a:endParaRPr lang="en-US" smtClean="0"/>
           </a:p>
           <a:p>
             <a:pPr lvl="3"/>
@@ -1748,6 +1752,7 @@
               <a:rPr lang="en-US" smtClean="0"/>
               <a:t>Fourth level</a:t>
             </a:r>
+            <a:endParaRPr lang="en-US" smtClean="0"/>
           </a:p>
           <a:p>
             <a:pPr lvl="4"/>
@@ -1776,7 +1781,6 @@
           <a:p>
             <a:fld id="{5BCAD085-E8A6-8845-BD4E-CB4CCA059FC4}" type="datetimeFigureOut">
               <a:rPr lang="en-US" smtClean="0"/>
-              <a:t>1/27/13</a:t>
             </a:fld>
             <a:endParaRPr lang="en-US"/>
           </a:p>
@@ -1818,18 +1822,12 @@
           <a:p>
             <a:fld id="{C1FF6DA9-008F-8B48-92A6-B652298478BF}" type="slidenum">
               <a:rPr lang="en-US" smtClean="0"/>
-              <a:t>‹#›</a:t>
             </a:fld>
             <a:endParaRPr lang="en-US"/>
           </a:p>
         </p:txBody>
       </p:sp>
     </p:spTree>
-    <p:extLst>
-      <p:ext uri="{BB962C8B-B14F-4D97-AF65-F5344CB8AC3E}">
-        <p14:creationId xmlns:p14="http://schemas.microsoft.com/office/powerpoint/2010/main" val="990158736"/>
-      </p:ext>
-    </p:extLst>
   </p:cSld>
   <p:clrMapOvr>
     <a:masterClrMapping/>
@@ -1894,7 +1892,6 @@
           <a:p>
             <a:fld id="{5BCAD085-E8A6-8845-BD4E-CB4CCA059FC4}" type="datetimeFigureOut">
               <a:rPr lang="en-US" smtClean="0"/>
-              <a:t>1/27/13</a:t>
             </a:fld>
             <a:endParaRPr lang="en-US"/>
           </a:p>
@@ -1936,18 +1933,12 @@
           <a:p>
             <a:fld id="{C1FF6DA9-008F-8B48-92A6-B652298478BF}" type="slidenum">
               <a:rPr lang="en-US" smtClean="0"/>
-              <a:t>‹#›</a:t>
             </a:fld>
             <a:endParaRPr lang="en-US"/>
           </a:p>
         </p:txBody>
       </p:sp>
     </p:spTree>
-    <p:extLst>
-      <p:ext uri="{BB962C8B-B14F-4D97-AF65-F5344CB8AC3E}">
-        <p14:creationId xmlns:p14="http://schemas.microsoft.com/office/powerpoint/2010/main" val="727027711"/>
-      </p:ext>
-    </p:extLst>
   </p:cSld>
   <p:clrMapOvr>
     <a:masterClrMapping/>
@@ -1989,7 +1980,6 @@
           <a:p>
             <a:fld id="{5BCAD085-E8A6-8845-BD4E-CB4CCA059FC4}" type="datetimeFigureOut">
               <a:rPr lang="en-US" smtClean="0"/>
-              <a:t>1/27/13</a:t>
             </a:fld>
             <a:endParaRPr lang="en-US"/>
           </a:p>
@@ -2031,18 +2021,12 @@
           <a:p>
             <a:fld id="{C1FF6DA9-008F-8B48-92A6-B652298478BF}" type="slidenum">
               <a:rPr lang="en-US" smtClean="0"/>
-              <a:t>‹#›</a:t>
             </a:fld>
             <a:endParaRPr lang="en-US"/>
           </a:p>
         </p:txBody>
       </p:sp>
     </p:spTree>
-    <p:extLst>
-      <p:ext uri="{BB962C8B-B14F-4D97-AF65-F5344CB8AC3E}">
-        <p14:creationId xmlns:p14="http://schemas.microsoft.com/office/powerpoint/2010/main" val="1212999818"/>
-      </p:ext>
-    </p:extLst>
   </p:cSld>
   <p:clrMapOvr>
     <a:masterClrMapping/>
@@ -2152,6 +2136,7 @@
               <a:rPr lang="en-US" smtClean="0"/>
               <a:t>Click to edit Master text styles</a:t>
             </a:r>
+            <a:endParaRPr lang="en-US" smtClean="0"/>
           </a:p>
           <a:p>
             <a:pPr lvl="1"/>
@@ -2159,6 +2144,7 @@
               <a:rPr lang="en-US" smtClean="0"/>
               <a:t>Second level</a:t>
             </a:r>
+            <a:endParaRPr lang="en-US" smtClean="0"/>
           </a:p>
           <a:p>
             <a:pPr lvl="2"/>
@@ -2166,6 +2152,7 @@
               <a:rPr lang="en-US" smtClean="0"/>
               <a:t>Third level</a:t>
             </a:r>
+            <a:endParaRPr lang="en-US" smtClean="0"/>
           </a:p>
           <a:p>
             <a:pPr lvl="3"/>
@@ -2173,6 +2160,7 @@
               <a:rPr lang="en-US" smtClean="0"/>
               <a:t>Fourth level</a:t>
             </a:r>
+            <a:endParaRPr lang="en-US" smtClean="0"/>
           </a:p>
           <a:p>
             <a:pPr lvl="4"/>
@@ -2246,6 +2234,7 @@
               <a:rPr lang="en-US" smtClean="0"/>
               <a:t>Click to edit Master text styles</a:t>
             </a:r>
+            <a:endParaRPr lang="en-US" smtClean="0"/>
           </a:p>
         </p:txBody>
       </p:sp>
@@ -2266,7 +2255,6 @@
           <a:p>
             <a:fld id="{5BCAD085-E8A6-8845-BD4E-CB4CCA059FC4}" type="datetimeFigureOut">
               <a:rPr lang="en-US" smtClean="0"/>
-              <a:t>1/27/13</a:t>
             </a:fld>
             <a:endParaRPr lang="en-US"/>
           </a:p>
@@ -2308,18 +2296,12 @@
           <a:p>
             <a:fld id="{C1FF6DA9-008F-8B48-92A6-B652298478BF}" type="slidenum">
               <a:rPr lang="en-US" smtClean="0"/>
-              <a:t>‹#›</a:t>
             </a:fld>
             <a:endParaRPr lang="en-US"/>
           </a:p>
         </p:txBody>
       </p:sp>
     </p:spTree>
-    <p:extLst>
-      <p:ext uri="{BB962C8B-B14F-4D97-AF65-F5344CB8AC3E}">
-        <p14:creationId xmlns:p14="http://schemas.microsoft.com/office/powerpoint/2010/main" val="1840726560"/>
-      </p:ext>
-    </p:extLst>
   </p:cSld>
   <p:clrMapOvr>
     <a:masterClrMapping/>
@@ -2499,6 +2481,7 @@
               <a:rPr lang="en-US" smtClean="0"/>
               <a:t>Click to edit Master text styles</a:t>
             </a:r>
+            <a:endParaRPr lang="en-US" smtClean="0"/>
           </a:p>
         </p:txBody>
       </p:sp>
@@ -2519,7 +2502,6 @@
           <a:p>
             <a:fld id="{5BCAD085-E8A6-8845-BD4E-CB4CCA059FC4}" type="datetimeFigureOut">
               <a:rPr lang="en-US" smtClean="0"/>
-              <a:t>1/27/13</a:t>
             </a:fld>
             <a:endParaRPr lang="en-US"/>
           </a:p>
@@ -2561,18 +2543,12 @@
           <a:p>
             <a:fld id="{C1FF6DA9-008F-8B48-92A6-B652298478BF}" type="slidenum">
               <a:rPr lang="en-US" smtClean="0"/>
-              <a:t>‹#›</a:t>
             </a:fld>
             <a:endParaRPr lang="en-US"/>
           </a:p>
         </p:txBody>
       </p:sp>
     </p:spTree>
-    <p:extLst>
-      <p:ext uri="{BB962C8B-B14F-4D97-AF65-F5344CB8AC3E}">
-        <p14:creationId xmlns:p14="http://schemas.microsoft.com/office/powerpoint/2010/main" val="3889236939"/>
-      </p:ext>
-    </p:extLst>
   </p:cSld>
   <p:clrMapOvr>
     <a:masterClrMapping/>
@@ -2665,6 +2641,7 @@
               <a:rPr lang="en-US" smtClean="0"/>
               <a:t>Click to edit Master text styles</a:t>
             </a:r>
+            <a:endParaRPr lang="en-US" smtClean="0"/>
           </a:p>
           <a:p>
             <a:pPr lvl="1"/>
@@ -2672,6 +2649,7 @@
               <a:rPr lang="en-US" smtClean="0"/>
               <a:t>Second level</a:t>
             </a:r>
+            <a:endParaRPr lang="en-US" smtClean="0"/>
           </a:p>
           <a:p>
             <a:pPr lvl="2"/>
@@ -2679,6 +2657,7 @@
               <a:rPr lang="en-US" smtClean="0"/>
               <a:t>Third level</a:t>
             </a:r>
+            <a:endParaRPr lang="en-US" smtClean="0"/>
           </a:p>
           <a:p>
             <a:pPr lvl="3"/>
@@ -2686,6 +2665,7 @@
               <a:rPr lang="en-US" smtClean="0"/>
               <a:t>Fourth level</a:t>
             </a:r>
+            <a:endParaRPr lang="en-US" smtClean="0"/>
           </a:p>
           <a:p>
             <a:pPr lvl="4"/>
@@ -2732,7 +2712,6 @@
           <a:p>
             <a:fld id="{5BCAD085-E8A6-8845-BD4E-CB4CCA059FC4}" type="datetimeFigureOut">
               <a:rPr lang="en-US" smtClean="0"/>
-              <a:t>1/27/13</a:t>
             </a:fld>
             <a:endParaRPr lang="en-US"/>
           </a:p>
@@ -2810,18 +2789,12 @@
           <a:p>
             <a:fld id="{C1FF6DA9-008F-8B48-92A6-B652298478BF}" type="slidenum">
               <a:rPr lang="en-US" smtClean="0"/>
-              <a:t>‹#›</a:t>
             </a:fld>
             <a:endParaRPr lang="en-US"/>
           </a:p>
         </p:txBody>
       </p:sp>
     </p:spTree>
-    <p:extLst>
-      <p:ext uri="{BB962C8B-B14F-4D97-AF65-F5344CB8AC3E}">
-        <p14:creationId xmlns:p14="http://schemas.microsoft.com/office/powerpoint/2010/main" val="2209977519"/>
-      </p:ext>
-    </p:extLst>
   </p:cSld>
   <p:clrMap bg1="lt1" tx1="dk1" bg2="lt2" tx2="dk2" accent1="accent1" accent2="accent2" accent3="accent3" accent4="accent4" accent5="accent5" accent6="accent6" hlink="hlink" folHlink="folHlink"/>
   <p:sldLayoutIdLst>
@@ -2859,7 +2832,7 @@
         <a:spcBef>
           <a:spcPct val="20000"/>
         </a:spcBef>
-        <a:buFont typeface="Arial"/>
+        <a:buFont typeface="Arial" panose="020B0604020202020204"/>
         <a:buChar char="•"/>
         <a:defRPr sz="3200" kern="1200">
           <a:solidFill>
@@ -2874,7 +2847,7 @@
         <a:spcBef>
           <a:spcPct val="20000"/>
         </a:spcBef>
-        <a:buFont typeface="Arial"/>
+        <a:buFont typeface="Arial" panose="020B0604020202020204"/>
         <a:buChar char="–"/>
         <a:defRPr sz="2800" kern="1200">
           <a:solidFill>
@@ -2889,7 +2862,7 @@
         <a:spcBef>
           <a:spcPct val="20000"/>
         </a:spcBef>
-        <a:buFont typeface="Arial"/>
+        <a:buFont typeface="Arial" panose="020B0604020202020204"/>
         <a:buChar char="•"/>
         <a:defRPr sz="2400" kern="1200">
           <a:solidFill>
@@ -2904,7 +2877,7 @@
         <a:spcBef>
           <a:spcPct val="20000"/>
         </a:spcBef>
-        <a:buFont typeface="Arial"/>
+        <a:buFont typeface="Arial" panose="020B0604020202020204"/>
         <a:buChar char="–"/>
         <a:defRPr sz="2000" kern="1200">
           <a:solidFill>
@@ -2919,7 +2892,7 @@
         <a:spcBef>
           <a:spcPct val="20000"/>
         </a:spcBef>
-        <a:buFont typeface="Arial"/>
+        <a:buFont typeface="Arial" panose="020B0604020202020204"/>
         <a:buChar char="»"/>
         <a:defRPr sz="2000" kern="1200">
           <a:solidFill>
@@ -2934,7 +2907,7 @@
         <a:spcBef>
           <a:spcPct val="20000"/>
         </a:spcBef>
-        <a:buFont typeface="Arial"/>
+        <a:buFont typeface="Arial" panose="020B0604020202020204"/>
         <a:buChar char="•"/>
         <a:defRPr sz="2000" kern="1200">
           <a:solidFill>
@@ -2949,7 +2922,7 @@
         <a:spcBef>
           <a:spcPct val="20000"/>
         </a:spcBef>
-        <a:buFont typeface="Arial"/>
+        <a:buFont typeface="Arial" panose="020B0604020202020204"/>
         <a:buChar char="•"/>
         <a:defRPr sz="2000" kern="1200">
           <a:solidFill>
@@ -2964,7 +2937,7 @@
         <a:spcBef>
           <a:spcPct val="20000"/>
         </a:spcBef>
-        <a:buFont typeface="Arial"/>
+        <a:buFont typeface="Arial" panose="020B0604020202020204"/>
         <a:buChar char="•"/>
         <a:defRPr sz="2000" kern="1200">
           <a:solidFill>
@@ -2979,7 +2952,7 @@
         <a:spcBef>
           <a:spcPct val="20000"/>
         </a:spcBef>
-        <a:buFont typeface="Arial"/>
+        <a:buFont typeface="Arial" panose="020B0604020202020204"/>
         <a:buChar char="•"/>
         <a:defRPr sz="2000" kern="1200">
           <a:solidFill>
@@ -3091,7 +3064,7 @@
 </file>
 
 <file path=ppt/slides/slide1.xml><?xml version="1.0" encoding="utf-8"?>
-<p:sld xmlns:a="http://schemas.openxmlformats.org/drawingml/2006/main" xmlns:p="http://schemas.openxmlformats.org/presentationml/2006/main" xmlns:r="http://schemas.openxmlformats.org/officeDocument/2006/relationships">
+<p:sld xmlns:a="http://schemas.openxmlformats.org/drawingml/2006/main" xmlns:r="http://schemas.openxmlformats.org/officeDocument/2006/relationships" xmlns:p="http://schemas.openxmlformats.org/presentationml/2006/main">
   <p:cSld>
     <p:bg>
       <p:bgPr>
@@ -3179,10 +3152,16 @@
                 <a:solidFill>
                   <a:srgbClr val="F8FAFC"/>
                 </a:solidFill>
-                <a:latin typeface="Microsoft YaHei"/>
+                <a:latin typeface="微软雅黑" panose="020B0503020204020204" charset="-122"/>
               </a:rPr>
               <a:t>HAJIMI 自动操作助手</a:t>
             </a:r>
+            <a:endParaRPr sz="5400" b="1">
+              <a:solidFill>
+                <a:srgbClr val="F8FAFC"/>
+              </a:solidFill>
+              <a:latin typeface="微软雅黑" panose="020B0503020204020204" charset="-122"/>
+            </a:endParaRPr>
           </a:p>
         </p:txBody>
       </p:sp>
@@ -3214,10 +3193,16 @@
                 <a:solidFill>
                   <a:srgbClr val="06B6D4"/>
                 </a:solidFill>
-                <a:latin typeface="Microsoft YaHei"/>
+                <a:latin typeface="微软雅黑" panose="020B0503020204020204" charset="-122"/>
               </a:rPr>
               <a:t>看得懂屏幕 · 听得懂指令 · 帮你动手做</a:t>
             </a:r>
+            <a:endParaRPr sz="2200" b="0">
+              <a:solidFill>
+                <a:srgbClr val="06B6D4"/>
+              </a:solidFill>
+              <a:latin typeface="微软雅黑" panose="020B0503020204020204" charset="-122"/>
+            </a:endParaRPr>
           </a:p>
         </p:txBody>
       </p:sp>
@@ -3249,10 +3234,16 @@
                 <a:solidFill>
                   <a:srgbClr val="64748B"/>
                 </a:solidFill>
-                <a:latin typeface="Microsoft YaHei"/>
+                <a:latin typeface="微软雅黑" panose="020B0503020204020204" charset="-122"/>
               </a:rPr>
               <a:t>屏幕感知  →  意图理解  →  安全执行</a:t>
             </a:r>
+            <a:endParaRPr sz="1600" b="0">
+              <a:solidFill>
+                <a:srgbClr val="64748B"/>
+              </a:solidFill>
+              <a:latin typeface="微软雅黑" panose="020B0503020204020204" charset="-122"/>
+            </a:endParaRPr>
           </a:p>
         </p:txBody>
       </p:sp>
@@ -3284,10 +3275,16 @@
                 <a:solidFill>
                   <a:srgbClr val="F8FAFC"/>
                 </a:solidFill>
-                <a:latin typeface="Microsoft YaHei"/>
+                <a:latin typeface="微软雅黑" panose="020B0503020204020204" charset="-122"/>
               </a:rPr>
               <a:t>32 组  ·  潘振喆 / 杨名 / 涂浚稷  ·  2026.07</a:t>
             </a:r>
+            <a:endParaRPr sz="1500" b="0">
+              <a:solidFill>
+                <a:srgbClr val="F8FAFC"/>
+              </a:solidFill>
+              <a:latin typeface="微软雅黑" panose="020B0503020204020204" charset="-122"/>
+            </a:endParaRPr>
           </a:p>
         </p:txBody>
       </p:sp>
@@ -3330,7 +3327,7 @@
           </a:fontRef>
         </p:style>
         <p:txBody>
-          <a:bodyPr rtlCol="0" anchor="ctr" wrap="square"/>
+          <a:bodyPr wrap="square" rtlCol="0" anchor="ctr"/>
           <a:lstStyle/>
           <a:p>
             <a:pPr algn="ctr"/>
@@ -3339,10 +3336,16 @@
                 <a:solidFill>
                   <a:srgbClr val="64748B"/>
                 </a:solidFill>
-                <a:latin typeface="Microsoft YaHei"/>
+                <a:latin typeface="微软雅黑" panose="020B0503020204020204" charset="-122"/>
               </a:rPr>
               <a:t>📷 IMG-P01 项目代表图</a:t>
             </a:r>
+            <a:endParaRPr sz="1500">
+              <a:solidFill>
+                <a:srgbClr val="64748B"/>
+              </a:solidFill>
+              <a:latin typeface="微软雅黑" panose="020B0503020204020204" charset="-122"/>
+            </a:endParaRPr>
           </a:p>
         </p:txBody>
       </p:sp>
@@ -3355,7 +3358,7 @@
 </file>
 
 <file path=ppt/slides/slide10.xml><?xml version="1.0" encoding="utf-8"?>
-<p:sld xmlns:a="http://schemas.openxmlformats.org/drawingml/2006/main" xmlns:p="http://schemas.openxmlformats.org/presentationml/2006/main" xmlns:r="http://schemas.openxmlformats.org/officeDocument/2006/relationships">
+<p:sld xmlns:a="http://schemas.openxmlformats.org/drawingml/2006/main" xmlns:r="http://schemas.openxmlformats.org/officeDocument/2006/relationships" xmlns:p="http://schemas.openxmlformats.org/presentationml/2006/main">
   <p:cSld>
     <p:bg>
       <p:bgPr>
@@ -3400,10 +3403,16 @@
                 <a:solidFill>
                   <a:srgbClr val="06B6D4"/>
                 </a:solidFill>
-                <a:latin typeface="Microsoft YaHei"/>
+                <a:latin typeface="微软雅黑" panose="020B0503020204020204" charset="-122"/>
               </a:rPr>
               <a:t>成果 · 全链路</a:t>
             </a:r>
+            <a:endParaRPr sz="1300" b="1">
+              <a:solidFill>
+                <a:srgbClr val="06B6D4"/>
+              </a:solidFill>
+              <a:latin typeface="微软雅黑" panose="020B0503020204020204" charset="-122"/>
+            </a:endParaRPr>
           </a:p>
         </p:txBody>
       </p:sp>
@@ -3435,10 +3444,16 @@
                 <a:solidFill>
                   <a:srgbClr val="F8FAFC"/>
                 </a:solidFill>
-                <a:latin typeface="Microsoft YaHei"/>
+                <a:latin typeface="微软雅黑" panose="020B0503020204020204" charset="-122"/>
               </a:rPr>
               <a:t>端到端数据连通性验证</a:t>
             </a:r>
+            <a:endParaRPr sz="3000" b="1">
+              <a:solidFill>
+                <a:srgbClr val="F8FAFC"/>
+              </a:solidFill>
+              <a:latin typeface="微软雅黑" panose="020B0503020204020204" charset="-122"/>
+            </a:endParaRPr>
           </a:p>
         </p:txBody>
       </p:sp>
@@ -3524,7 +3539,7 @@
           </a:fontRef>
         </p:style>
         <p:txBody>
-          <a:bodyPr rtlCol="0" anchor="ctr" wrap="square"/>
+          <a:bodyPr wrap="square" rtlCol="0" anchor="ctr"/>
           <a:lstStyle/>
           <a:p>
             <a:pPr algn="ctr"/>
@@ -3533,10 +3548,16 @@
                 <a:solidFill>
                   <a:srgbClr val="64748B"/>
                 </a:solidFill>
-                <a:latin typeface="Microsoft YaHei"/>
+                <a:latin typeface="微软雅黑" panose="020B0503020204020204" charset="-122"/>
               </a:rPr>
               <a:t>📷 IMG-P10 connectivity 终端输出 (全 PASS)</a:t>
             </a:r>
+            <a:endParaRPr sz="1500">
+              <a:solidFill>
+                <a:srgbClr val="64748B"/>
+              </a:solidFill>
+              <a:latin typeface="微软雅黑" panose="020B0503020204020204" charset="-122"/>
+            </a:endParaRPr>
           </a:p>
         </p:txBody>
       </p:sp>
@@ -3572,7 +3593,7 @@
                 <a:solidFill>
                   <a:srgbClr val="06B6D4"/>
                 </a:solidFill>
-                <a:latin typeface="Microsoft YaHei"/>
+                <a:latin typeface="微软雅黑" panose="020B0503020204020204" charset="-122"/>
               </a:rPr>
               <a:t>▪ </a:t>
             </a:r>
@@ -3581,10 +3602,16 @@
                 <a:solidFill>
                   <a:srgbClr val="F8FAFC"/>
                 </a:solidFill>
-                <a:latin typeface="Microsoft YaHei"/>
+                <a:latin typeface="微软雅黑" panose="020B0503020204020204" charset="-122"/>
               </a:rPr>
               <a:t>审计回路：C→POST→A→DB→GET→C</a:t>
             </a:r>
+            <a:endParaRPr sz="1600">
+              <a:solidFill>
+                <a:srgbClr val="F8FAFC"/>
+              </a:solidFill>
+              <a:latin typeface="微软雅黑" panose="020B0503020204020204" charset="-122"/>
+            </a:endParaRPr>
           </a:p>
           <a:p>
             <a:pPr>
@@ -3597,7 +3624,7 @@
                 <a:solidFill>
                   <a:srgbClr val="06B6D4"/>
                 </a:solidFill>
-                <a:latin typeface="Microsoft YaHei"/>
+                <a:latin typeface="微软雅黑" panose="020B0503020204020204" charset="-122"/>
               </a:rPr>
               <a:t>▪ </a:t>
             </a:r>
@@ -3606,10 +3633,16 @@
                 <a:solidFill>
                   <a:srgbClr val="F8FAFC"/>
                 </a:solidFill>
-                <a:latin typeface="Microsoft YaHei"/>
+                <a:latin typeface="微软雅黑" panose="020B0503020204020204" charset="-122"/>
               </a:rPr>
               <a:t>配置回路：C→deploy→A→DB→pull→C</a:t>
             </a:r>
+            <a:endParaRPr sz="1600">
+              <a:solidFill>
+                <a:srgbClr val="F8FAFC"/>
+              </a:solidFill>
+              <a:latin typeface="微软雅黑" panose="020B0503020204020204" charset="-122"/>
+            </a:endParaRPr>
           </a:p>
           <a:p>
             <a:pPr>
@@ -3622,7 +3655,7 @@
                 <a:solidFill>
                   <a:srgbClr val="06B6D4"/>
                 </a:solidFill>
-                <a:latin typeface="Microsoft YaHei"/>
+                <a:latin typeface="微软雅黑" panose="020B0503020204020204" charset="-122"/>
               </a:rPr>
               <a:t>▪ </a:t>
             </a:r>
@@ -3631,10 +3664,16 @@
                 <a:solidFill>
                   <a:srgbClr val="F8FAFC"/>
                 </a:solidFill>
-                <a:latin typeface="Microsoft YaHei"/>
+                <a:latin typeface="微软雅黑" panose="020B0503020204020204" charset="-122"/>
               </a:rPr>
               <a:t>B-C 链路：9 信号契约仿真联调</a:t>
             </a:r>
+            <a:endParaRPr sz="1600">
+              <a:solidFill>
+                <a:srgbClr val="F8FAFC"/>
+              </a:solidFill>
+              <a:latin typeface="微软雅黑" panose="020B0503020204020204" charset="-122"/>
+            </a:endParaRPr>
           </a:p>
           <a:p>
             <a:pPr>
@@ -3647,7 +3686,7 @@
                 <a:solidFill>
                   <a:srgbClr val="06B6D4"/>
                 </a:solidFill>
-                <a:latin typeface="Microsoft YaHei"/>
+                <a:latin typeface="微软雅黑" panose="020B0503020204020204" charset="-122"/>
               </a:rPr>
               <a:t>▪ </a:t>
             </a:r>
@@ -3656,10 +3695,16 @@
                 <a:solidFill>
                   <a:srgbClr val="F8FAFC"/>
                 </a:solidFill>
-                <a:latin typeface="Microsoft YaHei"/>
+                <a:latin typeface="微软雅黑" panose="020B0503020204020204" charset="-122"/>
               </a:rPr>
               <a:t>鉴权：无 Key→401 · JWT 正常签发</a:t>
             </a:r>
+            <a:endParaRPr sz="1600">
+              <a:solidFill>
+                <a:srgbClr val="F8FAFC"/>
+              </a:solidFill>
+              <a:latin typeface="微软雅黑" panose="020B0503020204020204" charset="-122"/>
+            </a:endParaRPr>
           </a:p>
           <a:p>
             <a:pPr>
@@ -3672,7 +3717,7 @@
                 <a:solidFill>
                   <a:srgbClr val="06B6D4"/>
                 </a:solidFill>
-                <a:latin typeface="Microsoft YaHei"/>
+                <a:latin typeface="微软雅黑" panose="020B0503020204020204" charset="-122"/>
               </a:rPr>
               <a:t>▪ </a:t>
             </a:r>
@@ -3681,10 +3726,16 @@
                 <a:solidFill>
                   <a:srgbClr val="F8FAFC"/>
                 </a:solidFill>
-                <a:latin typeface="Microsoft YaHei"/>
+                <a:latin typeface="微软雅黑" panose="020B0503020204020204" charset="-122"/>
               </a:rPr>
               <a:t>脚本化：一键复验 real_api_test.py</a:t>
             </a:r>
+            <a:endParaRPr sz="1600">
+              <a:solidFill>
+                <a:srgbClr val="F8FAFC"/>
+              </a:solidFill>
+              <a:latin typeface="微软雅黑" panose="020B0503020204020204" charset="-122"/>
+            </a:endParaRPr>
           </a:p>
         </p:txBody>
       </p:sp>
@@ -3716,10 +3767,16 @@
                 <a:solidFill>
                   <a:srgbClr val="64748B"/>
                 </a:solidFill>
-                <a:latin typeface="Microsoft YaHei"/>
+                <a:latin typeface="微软雅黑" panose="020B0503020204020204" charset="-122"/>
               </a:rPr>
               <a:t>10/13</a:t>
             </a:r>
+            <a:endParaRPr sz="1100" b="0">
+              <a:solidFill>
+                <a:srgbClr val="64748B"/>
+              </a:solidFill>
+              <a:latin typeface="微软雅黑" panose="020B0503020204020204" charset="-122"/>
+            </a:endParaRPr>
           </a:p>
         </p:txBody>
       </p:sp>
@@ -3732,7 +3789,7 @@
 </file>
 
 <file path=ppt/slides/slide11.xml><?xml version="1.0" encoding="utf-8"?>
-<p:sld xmlns:a="http://schemas.openxmlformats.org/drawingml/2006/main" xmlns:p="http://schemas.openxmlformats.org/presentationml/2006/main" xmlns:r="http://schemas.openxmlformats.org/officeDocument/2006/relationships">
+<p:sld xmlns:a="http://schemas.openxmlformats.org/drawingml/2006/main" xmlns:r="http://schemas.openxmlformats.org/officeDocument/2006/relationships" xmlns:p="http://schemas.openxmlformats.org/presentationml/2006/main">
   <p:cSld>
     <p:bg>
       <p:bgPr>
@@ -3777,10 +3834,16 @@
                 <a:solidFill>
                   <a:srgbClr val="06B6D4"/>
                 </a:solidFill>
-                <a:latin typeface="Microsoft YaHei"/>
+                <a:latin typeface="微软雅黑" panose="020B0503020204020204" charset="-122"/>
               </a:rPr>
               <a:t>成果 · 237 项</a:t>
             </a:r>
+            <a:endParaRPr sz="1300" b="1">
+              <a:solidFill>
+                <a:srgbClr val="06B6D4"/>
+              </a:solidFill>
+              <a:latin typeface="微软雅黑" panose="020B0503020204020204" charset="-122"/>
+            </a:endParaRPr>
           </a:p>
         </p:txBody>
       </p:sp>
@@ -3812,10 +3875,16 @@
                 <a:solidFill>
                   <a:srgbClr val="F8FAFC"/>
                 </a:solidFill>
-                <a:latin typeface="Microsoft YaHei"/>
+                <a:latin typeface="微软雅黑" panose="020B0503020204020204" charset="-122"/>
               </a:rPr>
               <a:t>测试与质量保障</a:t>
             </a:r>
+            <a:endParaRPr sz="3000" b="1">
+              <a:solidFill>
+                <a:srgbClr val="F8FAFC"/>
+              </a:solidFill>
+              <a:latin typeface="微软雅黑" panose="020B0503020204020204" charset="-122"/>
+            </a:endParaRPr>
           </a:p>
         </p:txBody>
       </p:sp>
@@ -3871,7 +3940,7 @@
           <p:nvPr/>
         </p:nvPicPr>
         <p:blipFill>
-          <a:blip r:embed="rId2"/>
+          <a:blip r:embed="rId1"/>
           <a:stretch>
             <a:fillRect/>
           </a:stretch>
@@ -3914,10 +3983,16 @@
                 <a:solidFill>
                   <a:srgbClr val="64748B"/>
                 </a:solidFill>
-                <a:latin typeface="Microsoft YaHei"/>
+                <a:latin typeface="微软雅黑" panose="020B0503020204020204" charset="-122"/>
               </a:rPr>
               <a:t>11/13</a:t>
             </a:r>
+            <a:endParaRPr sz="1100" b="0">
+              <a:solidFill>
+                <a:srgbClr val="64748B"/>
+              </a:solidFill>
+              <a:latin typeface="微软雅黑" panose="020B0503020204020204" charset="-122"/>
+            </a:endParaRPr>
           </a:p>
         </p:txBody>
       </p:sp>
@@ -3930,7 +4005,7 @@
 </file>
 
 <file path=ppt/slides/slide12.xml><?xml version="1.0" encoding="utf-8"?>
-<p:sld xmlns:a="http://schemas.openxmlformats.org/drawingml/2006/main" xmlns:p="http://schemas.openxmlformats.org/presentationml/2006/main" xmlns:r="http://schemas.openxmlformats.org/officeDocument/2006/relationships">
+<p:sld xmlns:a="http://schemas.openxmlformats.org/drawingml/2006/main" xmlns:r="http://schemas.openxmlformats.org/officeDocument/2006/relationships" xmlns:p="http://schemas.openxmlformats.org/presentationml/2006/main">
   <p:cSld>
     <p:bg>
       <p:bgPr>
@@ -3975,10 +4050,16 @@
                 <a:solidFill>
                   <a:srgbClr val="06B6D4"/>
                 </a:solidFill>
-                <a:latin typeface="Microsoft YaHei"/>
+                <a:latin typeface="微软雅黑" panose="020B0503020204020204" charset="-122"/>
               </a:rPr>
               <a:t>总结</a:t>
             </a:r>
+            <a:endParaRPr sz="1300" b="1">
+              <a:solidFill>
+                <a:srgbClr val="06B6D4"/>
+              </a:solidFill>
+              <a:latin typeface="微软雅黑" panose="020B0503020204020204" charset="-122"/>
+            </a:endParaRPr>
           </a:p>
         </p:txBody>
       </p:sp>
@@ -4010,10 +4091,16 @@
                 <a:solidFill>
                   <a:srgbClr val="F8FAFC"/>
                 </a:solidFill>
-                <a:latin typeface="Microsoft YaHei"/>
+                <a:latin typeface="微软雅黑" panose="020B0503020204020204" charset="-122"/>
               </a:rPr>
               <a:t>项目总结与展望</a:t>
             </a:r>
+            <a:endParaRPr sz="3000" b="1">
+              <a:solidFill>
+                <a:srgbClr val="F8FAFC"/>
+              </a:solidFill>
+              <a:latin typeface="微软雅黑" panose="020B0503020204020204" charset="-122"/>
+            </a:endParaRPr>
           </a:p>
         </p:txBody>
       </p:sp>
@@ -4069,7 +4156,7 @@
           <p:nvPr/>
         </p:nvPicPr>
         <p:blipFill>
-          <a:blip r:embed="rId2"/>
+          <a:blip r:embed="rId1"/>
           <a:stretch>
             <a:fillRect/>
           </a:stretch>
@@ -4112,10 +4199,16 @@
                 <a:solidFill>
                   <a:srgbClr val="64748B"/>
                 </a:solidFill>
-                <a:latin typeface="Microsoft YaHei"/>
+                <a:latin typeface="微软雅黑" panose="020B0503020204020204" charset="-122"/>
               </a:rPr>
               <a:t>12/13</a:t>
             </a:r>
+            <a:endParaRPr sz="1100" b="0">
+              <a:solidFill>
+                <a:srgbClr val="64748B"/>
+              </a:solidFill>
+              <a:latin typeface="微软雅黑" panose="020B0503020204020204" charset="-122"/>
+            </a:endParaRPr>
           </a:p>
         </p:txBody>
       </p:sp>
@@ -4128,7 +4221,7 @@
 </file>
 
 <file path=ppt/slides/slide13.xml><?xml version="1.0" encoding="utf-8"?>
-<p:sld xmlns:a="http://schemas.openxmlformats.org/drawingml/2006/main" xmlns:p="http://schemas.openxmlformats.org/presentationml/2006/main" xmlns:r="http://schemas.openxmlformats.org/officeDocument/2006/relationships">
+<p:sld xmlns:a="http://schemas.openxmlformats.org/drawingml/2006/main" xmlns:r="http://schemas.openxmlformats.org/officeDocument/2006/relationships" xmlns:p="http://schemas.openxmlformats.org/presentationml/2006/main">
   <p:cSld>
     <p:bg>
       <p:bgPr>
@@ -4216,10 +4309,16 @@
                 <a:solidFill>
                   <a:srgbClr val="F8FAFC"/>
                 </a:solidFill>
-                <a:latin typeface="Microsoft YaHei"/>
+                <a:latin typeface="微软雅黑" panose="020B0503020204020204" charset="-122"/>
               </a:rPr>
               <a:t>谢谢！欢迎提问</a:t>
             </a:r>
+            <a:endParaRPr sz="4800" b="1">
+              <a:solidFill>
+                <a:srgbClr val="F8FAFC"/>
+              </a:solidFill>
+              <a:latin typeface="微软雅黑" panose="020B0503020204020204" charset="-122"/>
+            </a:endParaRPr>
           </a:p>
         </p:txBody>
       </p:sp>
@@ -4251,10 +4350,16 @@
                 <a:solidFill>
                   <a:srgbClr val="06B6D4"/>
                 </a:solidFill>
-                <a:latin typeface="Microsoft YaHei"/>
+                <a:latin typeface="微软雅黑" panose="020B0503020204020204" charset="-122"/>
               </a:rPr>
               <a:t>团队分工</a:t>
             </a:r>
+            <a:endParaRPr sz="1800" b="1">
+              <a:solidFill>
+                <a:srgbClr val="06B6D4"/>
+              </a:solidFill>
+              <a:latin typeface="微软雅黑" panose="020B0503020204020204" charset="-122"/>
+            </a:endParaRPr>
           </a:p>
         </p:txBody>
       </p:sp>
@@ -4267,7 +4372,7 @@
         <p:spPr>
           <a:xfrm>
             <a:off x="731520" y="4343400"/>
-            <a:ext cx="10698480" cy="1463040"/>
+            <a:ext cx="10698480" cy="1029970"/>
           </a:xfrm>
           <a:prstGeom prst="rect">
             <a:avLst/>
@@ -4290,10 +4395,46 @@
                 <a:solidFill>
                   <a:srgbClr val="F8FAFC"/>
                 </a:solidFill>
-                <a:latin typeface="Microsoft YaHei"/>
-              </a:rPr>
-              <a:t>潘振喆（20230383）— A 端 后端 / AI 规划</a:t>
-            </a:r>
+                <a:latin typeface="微软雅黑" panose="020B0503020204020204" charset="-122"/>
+              </a:rPr>
+              <a:t>潘振喆（20230383）— </a:t>
+            </a:r>
+            <a:r>
+              <a:rPr sz="1700">
+                <a:solidFill>
+                  <a:srgbClr val="F8FAFC"/>
+                </a:solidFill>
+                <a:latin typeface="微软雅黑" panose="020B0503020204020204" charset="-122"/>
+                <a:sym typeface="+mn-ea"/>
+              </a:rPr>
+              <a:t> B 端 前端 / 桌面客户端</a:t>
+            </a:r>
+            <a:r>
+              <a:rPr lang="en-US" sz="1700">
+                <a:solidFill>
+                  <a:srgbClr val="F8FAFC"/>
+                </a:solidFill>
+                <a:latin typeface="微软雅黑" panose="020B0503020204020204" charset="-122"/>
+                <a:sym typeface="+mn-ea"/>
+              </a:rPr>
+              <a:t>/</a:t>
+            </a:r>
+            <a:r>
+              <a:rPr lang="zh-CN" altLang="en-US" sz="1700">
+                <a:solidFill>
+                  <a:srgbClr val="F8FAFC"/>
+                </a:solidFill>
+                <a:latin typeface="微软雅黑" panose="020B0503020204020204" charset="-122"/>
+                <a:sym typeface="+mn-ea"/>
+              </a:rPr>
+              <a:t>模块适配</a:t>
+            </a:r>
+            <a:endParaRPr sz="1700" b="0">
+              <a:solidFill>
+                <a:srgbClr val="F8FAFC"/>
+              </a:solidFill>
+              <a:latin typeface="微软雅黑" panose="020B0503020204020204" charset="-122"/>
+            </a:endParaRPr>
           </a:p>
           <a:p>
             <a:pPr algn="ctr">
@@ -4306,10 +4447,27 @@
                 <a:solidFill>
                   <a:srgbClr val="F8FAFC"/>
                 </a:solidFill>
-                <a:latin typeface="Microsoft YaHei"/>
-              </a:rPr>
-              <a:t>杨名（20230645）— B 端 前端 / 桌面客户端</a:t>
-            </a:r>
+                <a:latin typeface="微软雅黑" panose="020B0503020204020204" charset="-122"/>
+              </a:rPr>
+              <a:t>杨名（20230645）—</a:t>
+            </a:r>
+            <a:r>
+              <a:rPr sz="1700">
+                <a:solidFill>
+                  <a:srgbClr val="F8FAFC"/>
+                </a:solidFill>
+                <a:latin typeface="微软雅黑" panose="020B0503020204020204" charset="-122"/>
+                <a:sym typeface="+mn-ea"/>
+              </a:rPr>
+              <a:t>A 端 后端 / AI 规划</a:t>
+            </a:r>
+            <a:endParaRPr sz="1700">
+              <a:solidFill>
+                <a:srgbClr val="F8FAFC"/>
+              </a:solidFill>
+              <a:latin typeface="微软雅黑" panose="020B0503020204020204" charset="-122"/>
+              <a:sym typeface="+mn-ea"/>
+            </a:endParaRPr>
           </a:p>
           <a:p>
             <a:pPr algn="ctr">
@@ -4322,10 +4480,16 @@
                 <a:solidFill>
                   <a:srgbClr val="F8FAFC"/>
                 </a:solidFill>
-                <a:latin typeface="Microsoft YaHei"/>
+                <a:latin typeface="微软雅黑" panose="020B0503020204020204" charset="-122"/>
               </a:rPr>
               <a:t>涂浚稷（20230353）— C 端 集成 / 语音 / 管理面板</a:t>
             </a:r>
+            <a:endParaRPr sz="1700" b="0">
+              <a:solidFill>
+                <a:srgbClr val="F8FAFC"/>
+              </a:solidFill>
+              <a:latin typeface="微软雅黑" panose="020B0503020204020204" charset="-122"/>
+            </a:endParaRPr>
           </a:p>
         </p:txBody>
       </p:sp>
@@ -4338,7 +4502,7 @@
 </file>
 
 <file path=ppt/slides/slide2.xml><?xml version="1.0" encoding="utf-8"?>
-<p:sld xmlns:a="http://schemas.openxmlformats.org/drawingml/2006/main" xmlns:p="http://schemas.openxmlformats.org/presentationml/2006/main" xmlns:r="http://schemas.openxmlformats.org/officeDocument/2006/relationships">
+<p:sld xmlns:a="http://schemas.openxmlformats.org/drawingml/2006/main" xmlns:r="http://schemas.openxmlformats.org/officeDocument/2006/relationships" xmlns:p="http://schemas.openxmlformats.org/presentationml/2006/main">
   <p:cSld>
     <p:bg>
       <p:bgPr>
@@ -4383,10 +4547,16 @@
                 <a:solidFill>
                   <a:srgbClr val="06B6D4"/>
                 </a:solidFill>
-                <a:latin typeface="Microsoft YaHei"/>
+                <a:latin typeface="微软雅黑" panose="020B0503020204020204" charset="-122"/>
               </a:rPr>
               <a:t>WHY · 为什么做</a:t>
             </a:r>
+            <a:endParaRPr sz="1300" b="1">
+              <a:solidFill>
+                <a:srgbClr val="06B6D4"/>
+              </a:solidFill>
+              <a:latin typeface="微软雅黑" panose="020B0503020204020204" charset="-122"/>
+            </a:endParaRPr>
           </a:p>
         </p:txBody>
       </p:sp>
@@ -4418,10 +4588,16 @@
                 <a:solidFill>
                   <a:srgbClr val="F8FAFC"/>
                 </a:solidFill>
-                <a:latin typeface="Microsoft YaHei"/>
+                <a:latin typeface="微软雅黑" panose="020B0503020204020204" charset="-122"/>
               </a:rPr>
               <a:t>项目背景与痛点</a:t>
             </a:r>
+            <a:endParaRPr sz="3000" b="1">
+              <a:solidFill>
+                <a:srgbClr val="F8FAFC"/>
+              </a:solidFill>
+              <a:latin typeface="微软雅黑" panose="020B0503020204020204" charset="-122"/>
+            </a:endParaRPr>
           </a:p>
         </p:txBody>
       </p:sp>
@@ -4477,7 +4653,7 @@
           <p:nvPr/>
         </p:nvPicPr>
         <p:blipFill>
-          <a:blip r:embed="rId2"/>
+          <a:blip r:embed="rId1"/>
           <a:stretch>
             <a:fillRect/>
           </a:stretch>
@@ -4520,10 +4696,16 @@
                 <a:solidFill>
                   <a:srgbClr val="64748B"/>
                 </a:solidFill>
-                <a:latin typeface="Microsoft YaHei"/>
+                <a:latin typeface="微软雅黑" panose="020B0503020204020204" charset="-122"/>
               </a:rPr>
               <a:t>面向新手 / 老年 / 视障用户：把「查教程—切窗口—反复试」压缩成「说一句话」</a:t>
             </a:r>
+            <a:endParaRPr sz="1500" b="0">
+              <a:solidFill>
+                <a:srgbClr val="64748B"/>
+              </a:solidFill>
+              <a:latin typeface="微软雅黑" panose="020B0503020204020204" charset="-122"/>
+            </a:endParaRPr>
           </a:p>
         </p:txBody>
       </p:sp>
@@ -4555,10 +4737,16 @@
                 <a:solidFill>
                   <a:srgbClr val="64748B"/>
                 </a:solidFill>
-                <a:latin typeface="Microsoft YaHei"/>
+                <a:latin typeface="微软雅黑" panose="020B0503020204020204" charset="-122"/>
               </a:rPr>
               <a:t>02/13</a:t>
             </a:r>
+            <a:endParaRPr sz="1100" b="0">
+              <a:solidFill>
+                <a:srgbClr val="64748B"/>
+              </a:solidFill>
+              <a:latin typeface="微软雅黑" panose="020B0503020204020204" charset="-122"/>
+            </a:endParaRPr>
           </a:p>
         </p:txBody>
       </p:sp>
@@ -4571,7 +4759,7 @@
 </file>
 
 <file path=ppt/slides/slide3.xml><?xml version="1.0" encoding="utf-8"?>
-<p:sld xmlns:a="http://schemas.openxmlformats.org/drawingml/2006/main" xmlns:p="http://schemas.openxmlformats.org/presentationml/2006/main" xmlns:r="http://schemas.openxmlformats.org/officeDocument/2006/relationships">
+<p:sld xmlns:a="http://schemas.openxmlformats.org/drawingml/2006/main" xmlns:r="http://schemas.openxmlformats.org/officeDocument/2006/relationships" xmlns:p="http://schemas.openxmlformats.org/presentationml/2006/main">
   <p:cSld>
     <p:bg>
       <p:bgPr>
@@ -4616,10 +4804,16 @@
                 <a:solidFill>
                   <a:srgbClr val="06B6D4"/>
                 </a:solidFill>
-                <a:latin typeface="Microsoft YaHei"/>
+                <a:latin typeface="微软雅黑" panose="020B0503020204020204" charset="-122"/>
               </a:rPr>
               <a:t>WHAT · 做什么</a:t>
             </a:r>
+            <a:endParaRPr sz="1300" b="1">
+              <a:solidFill>
+                <a:srgbClr val="06B6D4"/>
+              </a:solidFill>
+              <a:latin typeface="微软雅黑" panose="020B0503020204020204" charset="-122"/>
+            </a:endParaRPr>
           </a:p>
         </p:txBody>
       </p:sp>
@@ -4651,10 +4845,16 @@
                 <a:solidFill>
                   <a:srgbClr val="F8FAFC"/>
                 </a:solidFill>
-                <a:latin typeface="Microsoft YaHei"/>
+                <a:latin typeface="微软雅黑" panose="020B0503020204020204" charset="-122"/>
               </a:rPr>
               <a:t>系统定位与核心能力</a:t>
             </a:r>
+            <a:endParaRPr sz="3000" b="1">
+              <a:solidFill>
+                <a:srgbClr val="F8FAFC"/>
+              </a:solidFill>
+              <a:latin typeface="微软雅黑" panose="020B0503020204020204" charset="-122"/>
+            </a:endParaRPr>
           </a:p>
         </p:txBody>
       </p:sp>
@@ -4710,7 +4910,7 @@
           <p:nvPr/>
         </p:nvPicPr>
         <p:blipFill>
-          <a:blip r:embed="rId2"/>
+          <a:blip r:embed="rId1"/>
           <a:stretch>
             <a:fillRect/>
           </a:stretch>
@@ -4753,10 +4953,16 @@
                 <a:solidFill>
                   <a:srgbClr val="64748B"/>
                 </a:solidFill>
-                <a:latin typeface="Microsoft YaHei"/>
+                <a:latin typeface="微软雅黑" panose="020B0503020204020204" charset="-122"/>
               </a:rPr>
               <a:t>03/13</a:t>
             </a:r>
+            <a:endParaRPr sz="1100" b="0">
+              <a:solidFill>
+                <a:srgbClr val="64748B"/>
+              </a:solidFill>
+              <a:latin typeface="微软雅黑" panose="020B0503020204020204" charset="-122"/>
+            </a:endParaRPr>
           </a:p>
         </p:txBody>
       </p:sp>
@@ -4769,7 +4975,7 @@
 </file>
 
 <file path=ppt/slides/slide4.xml><?xml version="1.0" encoding="utf-8"?>
-<p:sld xmlns:a="http://schemas.openxmlformats.org/drawingml/2006/main" xmlns:p="http://schemas.openxmlformats.org/presentationml/2006/main" xmlns:r="http://schemas.openxmlformats.org/officeDocument/2006/relationships">
+<p:sld xmlns:a="http://schemas.openxmlformats.org/drawingml/2006/main" xmlns:r="http://schemas.openxmlformats.org/officeDocument/2006/relationships" xmlns:p="http://schemas.openxmlformats.org/presentationml/2006/main">
   <p:cSld>
     <p:bg>
       <p:bgPr>
@@ -4814,10 +5020,16 @@
                 <a:solidFill>
                   <a:srgbClr val="06B6D4"/>
                 </a:solidFill>
-                <a:latin typeface="Microsoft YaHei"/>
+                <a:latin typeface="微软雅黑" panose="020B0503020204020204" charset="-122"/>
               </a:rPr>
               <a:t>HOW · 技术实现</a:t>
             </a:r>
+            <a:endParaRPr sz="1300" b="1">
+              <a:solidFill>
+                <a:srgbClr val="06B6D4"/>
+              </a:solidFill>
+              <a:latin typeface="微软雅黑" panose="020B0503020204020204" charset="-122"/>
+            </a:endParaRPr>
           </a:p>
         </p:txBody>
       </p:sp>
@@ -4849,10 +5061,16 @@
                 <a:solidFill>
                   <a:srgbClr val="F8FAFC"/>
                 </a:solidFill>
-                <a:latin typeface="Microsoft YaHei"/>
+                <a:latin typeface="微软雅黑" panose="020B0503020204020204" charset="-122"/>
               </a:rPr>
               <a:t>技术架构 · 四层逻辑</a:t>
             </a:r>
+            <a:endParaRPr sz="3000" b="1">
+              <a:solidFill>
+                <a:srgbClr val="F8FAFC"/>
+              </a:solidFill>
+              <a:latin typeface="微软雅黑" panose="020B0503020204020204" charset="-122"/>
+            </a:endParaRPr>
           </a:p>
         </p:txBody>
       </p:sp>
@@ -4908,7 +5126,7 @@
           <p:nvPr/>
         </p:nvPicPr>
         <p:blipFill>
-          <a:blip r:embed="rId2"/>
+          <a:blip r:embed="rId1"/>
           <a:stretch>
             <a:fillRect/>
           </a:stretch>
@@ -4951,10 +5169,16 @@
                 <a:solidFill>
                   <a:srgbClr val="64748B"/>
                 </a:solidFill>
-                <a:latin typeface="Microsoft YaHei"/>
+                <a:latin typeface="微软雅黑" panose="020B0503020204020204" charset="-122"/>
               </a:rPr>
               <a:t>04/13</a:t>
             </a:r>
+            <a:endParaRPr sz="1100" b="0">
+              <a:solidFill>
+                <a:srgbClr val="64748B"/>
+              </a:solidFill>
+              <a:latin typeface="微软雅黑" panose="020B0503020204020204" charset="-122"/>
+            </a:endParaRPr>
           </a:p>
         </p:txBody>
       </p:sp>
@@ -4967,7 +5191,7 @@
 </file>
 
 <file path=ppt/slides/slide5.xml><?xml version="1.0" encoding="utf-8"?>
-<p:sld xmlns:a="http://schemas.openxmlformats.org/drawingml/2006/main" xmlns:p="http://schemas.openxmlformats.org/presentationml/2006/main" xmlns:r="http://schemas.openxmlformats.org/officeDocument/2006/relationships">
+<p:sld xmlns:a="http://schemas.openxmlformats.org/drawingml/2006/main" xmlns:r="http://schemas.openxmlformats.org/officeDocument/2006/relationships" xmlns:p="http://schemas.openxmlformats.org/presentationml/2006/main">
   <p:cSld>
     <p:bg>
       <p:bgPr>
@@ -5012,10 +5236,16 @@
                 <a:solidFill>
                   <a:srgbClr val="06B6D4"/>
                 </a:solidFill>
-                <a:latin typeface="Microsoft YaHei"/>
+                <a:latin typeface="微软雅黑" panose="020B0503020204020204" charset="-122"/>
               </a:rPr>
               <a:t>HOW · 业务链路</a:t>
             </a:r>
+            <a:endParaRPr sz="1300" b="1">
+              <a:solidFill>
+                <a:srgbClr val="06B6D4"/>
+              </a:solidFill>
+              <a:latin typeface="微软雅黑" panose="020B0503020204020204" charset="-122"/>
+            </a:endParaRPr>
           </a:p>
         </p:txBody>
       </p:sp>
@@ -5047,10 +5277,16 @@
                 <a:solidFill>
                   <a:srgbClr val="F8FAFC"/>
                 </a:solidFill>
-                <a:latin typeface="Microsoft YaHei"/>
+                <a:latin typeface="微软雅黑" panose="020B0503020204020204" charset="-122"/>
               </a:rPr>
               <a:t>核心业务流程 · 时序</a:t>
             </a:r>
+            <a:endParaRPr sz="3000" b="1">
+              <a:solidFill>
+                <a:srgbClr val="F8FAFC"/>
+              </a:solidFill>
+              <a:latin typeface="微软雅黑" panose="020B0503020204020204" charset="-122"/>
+            </a:endParaRPr>
           </a:p>
         </p:txBody>
       </p:sp>
@@ -5106,7 +5342,7 @@
           <p:nvPr/>
         </p:nvPicPr>
         <p:blipFill>
-          <a:blip r:embed="rId2"/>
+          <a:blip r:embed="rId1"/>
           <a:stretch>
             <a:fillRect/>
           </a:stretch>
@@ -5149,10 +5385,16 @@
                 <a:solidFill>
                   <a:srgbClr val="64748B"/>
                 </a:solidFill>
-                <a:latin typeface="Microsoft YaHei"/>
+                <a:latin typeface="微软雅黑" panose="020B0503020204020204" charset="-122"/>
               </a:rPr>
               <a:t>05/13</a:t>
             </a:r>
+            <a:endParaRPr sz="1100" b="0">
+              <a:solidFill>
+                <a:srgbClr val="64748B"/>
+              </a:solidFill>
+              <a:latin typeface="微软雅黑" panose="020B0503020204020204" charset="-122"/>
+            </a:endParaRPr>
           </a:p>
         </p:txBody>
       </p:sp>
@@ -5165,7 +5407,7 @@
 </file>
 
 <file path=ppt/slides/slide6.xml><?xml version="1.0" encoding="utf-8"?>
-<p:sld xmlns:a="http://schemas.openxmlformats.org/drawingml/2006/main" xmlns:p="http://schemas.openxmlformats.org/presentationml/2006/main" xmlns:r="http://schemas.openxmlformats.org/officeDocument/2006/relationships">
+<p:sld xmlns:a="http://schemas.openxmlformats.org/drawingml/2006/main" xmlns:r="http://schemas.openxmlformats.org/officeDocument/2006/relationships" xmlns:p="http://schemas.openxmlformats.org/presentationml/2006/main">
   <p:cSld>
     <p:bg>
       <p:bgPr>
@@ -5210,10 +5452,16 @@
                 <a:solidFill>
                   <a:srgbClr val="06B6D4"/>
                 </a:solidFill>
-                <a:latin typeface="Microsoft YaHei"/>
+                <a:latin typeface="微软雅黑" panose="020B0503020204020204" charset="-122"/>
               </a:rPr>
               <a:t>成果 · FastAPI</a:t>
             </a:r>
+            <a:endParaRPr sz="1300" b="1">
+              <a:solidFill>
+                <a:srgbClr val="06B6D4"/>
+              </a:solidFill>
+              <a:latin typeface="微软雅黑" panose="020B0503020204020204" charset="-122"/>
+            </a:endParaRPr>
           </a:p>
         </p:txBody>
       </p:sp>
@@ -5245,10 +5493,16 @@
                 <a:solidFill>
                   <a:srgbClr val="F8FAFC"/>
                 </a:solidFill>
-                <a:latin typeface="Microsoft YaHei"/>
+                <a:latin typeface="微软雅黑" panose="020B0503020204020204" charset="-122"/>
               </a:rPr>
               <a:t>A 端 · 后端服务</a:t>
             </a:r>
+            <a:endParaRPr sz="3000" b="1">
+              <a:solidFill>
+                <a:srgbClr val="F8FAFC"/>
+              </a:solidFill>
+              <a:latin typeface="微软雅黑" panose="020B0503020204020204" charset="-122"/>
+            </a:endParaRPr>
           </a:p>
         </p:txBody>
       </p:sp>
@@ -5304,7 +5558,7 @@
           <p:nvPr/>
         </p:nvPicPr>
         <p:blipFill>
-          <a:blip r:embed="rId2"/>
+          <a:blip r:embed="rId1"/>
           <a:stretch>
             <a:fillRect/>
           </a:stretch>
@@ -5347,10 +5601,16 @@
                 <a:solidFill>
                   <a:srgbClr val="64748B"/>
                 </a:solidFill>
-                <a:latin typeface="Microsoft YaHei"/>
+                <a:latin typeface="微软雅黑" panose="020B0503020204020204" charset="-122"/>
               </a:rPr>
               <a:t>06/13</a:t>
             </a:r>
+            <a:endParaRPr sz="1100" b="0">
+              <a:solidFill>
+                <a:srgbClr val="64748B"/>
+              </a:solidFill>
+              <a:latin typeface="微软雅黑" panose="020B0503020204020204" charset="-122"/>
+            </a:endParaRPr>
           </a:p>
         </p:txBody>
       </p:sp>
@@ -5363,7 +5623,7 @@
 </file>
 
 <file path=ppt/slides/slide7.xml><?xml version="1.0" encoding="utf-8"?>
-<p:sld xmlns:a="http://schemas.openxmlformats.org/drawingml/2006/main" xmlns:p="http://schemas.openxmlformats.org/presentationml/2006/main" xmlns:r="http://schemas.openxmlformats.org/officeDocument/2006/relationships">
+<p:sld xmlns:a="http://schemas.openxmlformats.org/drawingml/2006/main" xmlns:r="http://schemas.openxmlformats.org/officeDocument/2006/relationships" xmlns:p="http://schemas.openxmlformats.org/presentationml/2006/main">
   <p:cSld>
     <p:bg>
       <p:bgPr>
@@ -5408,10 +5668,16 @@
                 <a:solidFill>
                   <a:srgbClr val="06B6D4"/>
                 </a:solidFill>
-                <a:latin typeface="Microsoft YaHei"/>
+                <a:latin typeface="微软雅黑" panose="020B0503020204020204" charset="-122"/>
               </a:rPr>
               <a:t>成果 · PyQt5</a:t>
             </a:r>
+            <a:endParaRPr sz="1300" b="1">
+              <a:solidFill>
+                <a:srgbClr val="06B6D4"/>
+              </a:solidFill>
+              <a:latin typeface="微软雅黑" panose="020B0503020204020204" charset="-122"/>
+            </a:endParaRPr>
           </a:p>
         </p:txBody>
       </p:sp>
@@ -5443,10 +5709,16 @@
                 <a:solidFill>
                   <a:srgbClr val="F8FAFC"/>
                 </a:solidFill>
-                <a:latin typeface="Microsoft YaHei"/>
+                <a:latin typeface="微软雅黑" panose="020B0503020204020204" charset="-122"/>
               </a:rPr>
               <a:t>B 端 · 桌面客户端</a:t>
             </a:r>
+            <a:endParaRPr sz="3000" b="1">
+              <a:solidFill>
+                <a:srgbClr val="F8FAFC"/>
+              </a:solidFill>
+              <a:latin typeface="微软雅黑" panose="020B0503020204020204" charset="-122"/>
+            </a:endParaRPr>
           </a:p>
         </p:txBody>
       </p:sp>
@@ -5525,7 +5797,7 @@
                 <a:solidFill>
                   <a:srgbClr val="06B6D4"/>
                 </a:solidFill>
-                <a:latin typeface="Microsoft YaHei"/>
+                <a:latin typeface="微软雅黑" panose="020B0503020204020204" charset="-122"/>
               </a:rPr>
               <a:t>▪ </a:t>
             </a:r>
@@ -5534,10 +5806,16 @@
                 <a:solidFill>
                   <a:srgbClr val="F8FAFC"/>
                 </a:solidFill>
-                <a:latin typeface="Microsoft YaHei"/>
+                <a:latin typeface="微软雅黑" panose="020B0503020204020204" charset="-122"/>
               </a:rPr>
               <a:t>无边框悬浮面板 480×520 + 紧凑条 320×52</a:t>
             </a:r>
+            <a:endParaRPr sz="1700">
+              <a:solidFill>
+                <a:srgbClr val="F8FAFC"/>
+              </a:solidFill>
+              <a:latin typeface="微软雅黑" panose="020B0503020204020204" charset="-122"/>
+            </a:endParaRPr>
           </a:p>
           <a:p>
             <a:pPr>
@@ -5550,7 +5828,7 @@
                 <a:solidFill>
                   <a:srgbClr val="06B6D4"/>
                 </a:solidFill>
-                <a:latin typeface="Microsoft YaHei"/>
+                <a:latin typeface="微软雅黑" panose="020B0503020204020204" charset="-122"/>
               </a:rPr>
               <a:t>▪ </a:t>
             </a:r>
@@ -5559,10 +5837,16 @@
                 <a:solidFill>
                   <a:srgbClr val="F8FAFC"/>
                 </a:solidFill>
-                <a:latin typeface="Microsoft YaHei"/>
+                <a:latin typeface="微软雅黑" panose="020B0503020204020204" charset="-122"/>
               </a:rPr>
               <a:t>三区：输入栏 / 步骤卡片 / 截图+日志</a:t>
             </a:r>
+            <a:endParaRPr sz="1700">
+              <a:solidFill>
+                <a:srgbClr val="F8FAFC"/>
+              </a:solidFill>
+              <a:latin typeface="微软雅黑" panose="020B0503020204020204" charset="-122"/>
+            </a:endParaRPr>
           </a:p>
           <a:p>
             <a:pPr>
@@ -5575,7 +5859,7 @@
                 <a:solidFill>
                   <a:srgbClr val="06B6D4"/>
                 </a:solidFill>
-                <a:latin typeface="Microsoft YaHei"/>
+                <a:latin typeface="微软雅黑" panose="020B0503020204020204" charset="-122"/>
               </a:rPr>
               <a:t>▪ </a:t>
             </a:r>
@@ -5584,10 +5868,16 @@
                 <a:solidFill>
                   <a:srgbClr val="F8FAFC"/>
                 </a:solidFill>
-                <a:latin typeface="Microsoft YaHei"/>
+                <a:latin typeface="微软雅黑" panose="020B0503020204020204" charset="-122"/>
               </a:rPr>
               <a:t>步骤 6 态：待执行/执行中/完成/失败/拦截/跳过</a:t>
             </a:r>
+            <a:endParaRPr sz="1700">
+              <a:solidFill>
+                <a:srgbClr val="F8FAFC"/>
+              </a:solidFill>
+              <a:latin typeface="微软雅黑" panose="020B0503020204020204" charset="-122"/>
+            </a:endParaRPr>
           </a:p>
           <a:p>
             <a:pPr>
@@ -5600,7 +5890,7 @@
                 <a:solidFill>
                   <a:srgbClr val="06B6D4"/>
                 </a:solidFill>
-                <a:latin typeface="Microsoft YaHei"/>
+                <a:latin typeface="微软雅黑" panose="020B0503020204020204" charset="-122"/>
               </a:rPr>
               <a:t>▪ </a:t>
             </a:r>
@@ -5609,10 +5899,16 @@
                 <a:solidFill>
                   <a:srgbClr val="F8FAFC"/>
                 </a:solidFill>
-                <a:latin typeface="Microsoft YaHei"/>
+                <a:latin typeface="微软雅黑" panose="020B0503020204020204" charset="-122"/>
               </a:rPr>
               <a:t>透明覆盖层：红色箭头 + 高亮框 + 编号标签</a:t>
             </a:r>
+            <a:endParaRPr sz="1700">
+              <a:solidFill>
+                <a:srgbClr val="F8FAFC"/>
+              </a:solidFill>
+              <a:latin typeface="微软雅黑" panose="020B0503020204020204" charset="-122"/>
+            </a:endParaRPr>
           </a:p>
           <a:p>
             <a:pPr>
@@ -5625,7 +5921,7 @@
                 <a:solidFill>
                   <a:srgbClr val="06B6D4"/>
                 </a:solidFill>
-                <a:latin typeface="Microsoft YaHei"/>
+                <a:latin typeface="微软雅黑" panose="020B0503020204020204" charset="-122"/>
               </a:rPr>
               <a:t>▪ </a:t>
             </a:r>
@@ -5634,10 +5930,16 @@
                 <a:solidFill>
                   <a:srgbClr val="F8FAFC"/>
                 </a:solidFill>
-                <a:latin typeface="Microsoft YaHei"/>
+                <a:latin typeface="微软雅黑" panose="020B0503020204020204" charset="-122"/>
               </a:rPr>
               <a:t>多主题 · 系统托盘 · 拖拽 · 置顶 · Resize</a:t>
             </a:r>
+            <a:endParaRPr sz="1700">
+              <a:solidFill>
+                <a:srgbClr val="F8FAFC"/>
+              </a:solidFill>
+              <a:latin typeface="微软雅黑" panose="020B0503020204020204" charset="-122"/>
+            </a:endParaRPr>
           </a:p>
         </p:txBody>
       </p:sp>
@@ -5680,7 +5982,7 @@
           </a:fontRef>
         </p:style>
         <p:txBody>
-          <a:bodyPr rtlCol="0" anchor="ctr" wrap="square"/>
+          <a:bodyPr wrap="square" rtlCol="0" anchor="ctr"/>
           <a:lstStyle/>
           <a:p>
             <a:pPr algn="ctr"/>
@@ -5689,10 +5991,16 @@
                 <a:solidFill>
                   <a:srgbClr val="64748B"/>
                 </a:solidFill>
-                <a:latin typeface="Microsoft YaHei"/>
+                <a:latin typeface="微软雅黑" panose="020B0503020204020204" charset="-122"/>
               </a:rPr>
               <a:t>📷 IMG-P07 悬浮面板 + 全屏覆盖层截图</a:t>
             </a:r>
+            <a:endParaRPr sz="1500">
+              <a:solidFill>
+                <a:srgbClr val="64748B"/>
+              </a:solidFill>
+              <a:latin typeface="微软雅黑" panose="020B0503020204020204" charset="-122"/>
+            </a:endParaRPr>
           </a:p>
         </p:txBody>
       </p:sp>
@@ -5724,10 +6032,16 @@
                 <a:solidFill>
                   <a:srgbClr val="64748B"/>
                 </a:solidFill>
-                <a:latin typeface="Microsoft YaHei"/>
+                <a:latin typeface="微软雅黑" panose="020B0503020204020204" charset="-122"/>
               </a:rPr>
               <a:t>07/13</a:t>
             </a:r>
+            <a:endParaRPr sz="1100" b="0">
+              <a:solidFill>
+                <a:srgbClr val="64748B"/>
+              </a:solidFill>
+              <a:latin typeface="微软雅黑" panose="020B0503020204020204" charset="-122"/>
+            </a:endParaRPr>
           </a:p>
         </p:txBody>
       </p:sp>
@@ -5740,7 +6054,7 @@
 </file>
 
 <file path=ppt/slides/slide8.xml><?xml version="1.0" encoding="utf-8"?>
-<p:sld xmlns:a="http://schemas.openxmlformats.org/drawingml/2006/main" xmlns:p="http://schemas.openxmlformats.org/presentationml/2006/main" xmlns:r="http://schemas.openxmlformats.org/officeDocument/2006/relationships">
+<p:sld xmlns:a="http://schemas.openxmlformats.org/drawingml/2006/main" xmlns:r="http://schemas.openxmlformats.org/officeDocument/2006/relationships" xmlns:p="http://schemas.openxmlformats.org/presentationml/2006/main">
   <p:cSld>
     <p:bg>
       <p:bgPr>
@@ -5785,10 +6099,16 @@
                 <a:solidFill>
                   <a:srgbClr val="06B6D4"/>
                 </a:solidFill>
-                <a:latin typeface="Microsoft YaHei"/>
+                <a:latin typeface="微软雅黑" panose="020B0503020204020204" charset="-122"/>
               </a:rPr>
               <a:t>★ 本期亮点</a:t>
             </a:r>
+            <a:endParaRPr sz="1300" b="1">
+              <a:solidFill>
+                <a:srgbClr val="06B6D4"/>
+              </a:solidFill>
+              <a:latin typeface="微软雅黑" panose="020B0503020204020204" charset="-122"/>
+            </a:endParaRPr>
           </a:p>
         </p:txBody>
       </p:sp>
@@ -5820,10 +6140,16 @@
                 <a:solidFill>
                   <a:srgbClr val="F8FAFC"/>
                 </a:solidFill>
-                <a:latin typeface="Microsoft YaHei"/>
+                <a:latin typeface="微软雅黑" panose="020B0503020204020204" charset="-122"/>
               </a:rPr>
               <a:t>B 端 · V2.2 自动执行</a:t>
             </a:r>
+            <a:endParaRPr sz="3000" b="1">
+              <a:solidFill>
+                <a:srgbClr val="F8FAFC"/>
+              </a:solidFill>
+              <a:latin typeface="微软雅黑" panose="020B0503020204020204" charset="-122"/>
+            </a:endParaRPr>
           </a:p>
         </p:txBody>
       </p:sp>
@@ -5902,7 +6228,7 @@
                 <a:solidFill>
                   <a:srgbClr val="06B6D4"/>
                 </a:solidFill>
-                <a:latin typeface="Microsoft YaHei"/>
+                <a:latin typeface="微软雅黑" panose="020B0503020204020204" charset="-122"/>
               </a:rPr>
               <a:t>▪ </a:t>
             </a:r>
@@ -5911,10 +6237,16 @@
                 <a:solidFill>
                   <a:srgbClr val="F8FAFC"/>
                 </a:solidFill>
-                <a:latin typeface="Microsoft YaHei"/>
+                <a:latin typeface="微软雅黑" panose="020B0503020204020204" charset="-122"/>
               </a:rPr>
               <a:t>V1 只「指路」→ V2.2 直接代为操作 (pyautogui)</a:t>
             </a:r>
+            <a:endParaRPr sz="1700">
+              <a:solidFill>
+                <a:srgbClr val="F8FAFC"/>
+              </a:solidFill>
+              <a:latin typeface="微软雅黑" panose="020B0503020204020204" charset="-122"/>
+            </a:endParaRPr>
           </a:p>
           <a:p>
             <a:pPr>
@@ -5927,7 +6259,7 @@
                 <a:solidFill>
                   <a:srgbClr val="06B6D4"/>
                 </a:solidFill>
-                <a:latin typeface="Microsoft YaHei"/>
+                <a:latin typeface="微软雅黑" panose="020B0503020204020204" charset="-122"/>
               </a:rPr>
               <a:t>▪ </a:t>
             </a:r>
@@ -5936,10 +6268,16 @@
                 <a:solidFill>
                   <a:srgbClr val="F8FAFC"/>
                 </a:solidFill>
-                <a:latin typeface="Microsoft YaHei"/>
+                <a:latin typeface="微软雅黑" panose="020B0503020204020204" charset="-122"/>
               </a:rPr>
               <a:t>每步卡片显示 action 类型 + 风险评分圆点</a:t>
             </a:r>
+            <a:endParaRPr sz="1700">
+              <a:solidFill>
+                <a:srgbClr val="F8FAFC"/>
+              </a:solidFill>
+              <a:latin typeface="微软雅黑" panose="020B0503020204020204" charset="-122"/>
+            </a:endParaRPr>
           </a:p>
           <a:p>
             <a:pPr>
@@ -5952,7 +6290,7 @@
                 <a:solidFill>
                   <a:srgbClr val="06B6D4"/>
                 </a:solidFill>
-                <a:latin typeface="Microsoft YaHei"/>
+                <a:latin typeface="微软雅黑" panose="020B0503020204020204" charset="-122"/>
               </a:rPr>
               <a:t>▪ </a:t>
             </a:r>
@@ -5961,10 +6299,16 @@
                 <a:solidFill>
                   <a:srgbClr val="F8FAFC"/>
                 </a:solidFill>
-                <a:latin typeface="Microsoft YaHei"/>
+                <a:latin typeface="微软雅黑" panose="020B0503020204020204" charset="-122"/>
               </a:rPr>
               <a:t>L2 快路径 &lt;3s · L3 慢路径 LLM 规划 5–10s</a:t>
             </a:r>
+            <a:endParaRPr sz="1700">
+              <a:solidFill>
+                <a:srgbClr val="F8FAFC"/>
+              </a:solidFill>
+              <a:latin typeface="微软雅黑" panose="020B0503020204020204" charset="-122"/>
+            </a:endParaRPr>
           </a:p>
           <a:p>
             <a:pPr>
@@ -5977,7 +6321,7 @@
                 <a:solidFill>
                   <a:srgbClr val="06B6D4"/>
                 </a:solidFill>
-                <a:latin typeface="Microsoft YaHei"/>
+                <a:latin typeface="微软雅黑" panose="020B0503020204020204" charset="-122"/>
               </a:rPr>
               <a:t>▪ </a:t>
             </a:r>
@@ -5986,10 +6330,16 @@
                 <a:solidFill>
                   <a:srgbClr val="F8FAFC"/>
                 </a:solidFill>
-                <a:latin typeface="Microsoft YaHei"/>
+                <a:latin typeface="微软雅黑" panose="020B0503020204020204" charset="-122"/>
               </a:rPr>
               <a:t>蓝图状态机：生成→执行→完成/挂起/回退</a:t>
             </a:r>
+            <a:endParaRPr sz="1700">
+              <a:solidFill>
+                <a:srgbClr val="F8FAFC"/>
+              </a:solidFill>
+              <a:latin typeface="微软雅黑" panose="020B0503020204020204" charset="-122"/>
+            </a:endParaRPr>
           </a:p>
           <a:p>
             <a:pPr>
@@ -6002,7 +6352,7 @@
                 <a:solidFill>
                   <a:srgbClr val="06B6D4"/>
                 </a:solidFill>
-                <a:latin typeface="Microsoft YaHei"/>
+                <a:latin typeface="微软雅黑" panose="020B0503020204020204" charset="-122"/>
               </a:rPr>
               <a:t>▪ </a:t>
             </a:r>
@@ -6011,10 +6361,16 @@
                 <a:solidFill>
                   <a:srgbClr val="F8FAFC"/>
                 </a:solidFill>
-                <a:latin typeface="Microsoft YaHei"/>
+                <a:latin typeface="微软雅黑" panose="020B0503020204020204" charset="-122"/>
               </a:rPr>
               <a:t>风险 ≥4 自动挂起，等待用户确认</a:t>
             </a:r>
+            <a:endParaRPr sz="1700">
+              <a:solidFill>
+                <a:srgbClr val="F8FAFC"/>
+              </a:solidFill>
+              <a:latin typeface="微软雅黑" panose="020B0503020204020204" charset="-122"/>
+            </a:endParaRPr>
           </a:p>
         </p:txBody>
       </p:sp>
@@ -6057,7 +6413,7 @@
           </a:fontRef>
         </p:style>
         <p:txBody>
-          <a:bodyPr rtlCol="0" anchor="ctr" wrap="square"/>
+          <a:bodyPr wrap="square" rtlCol="0" anchor="ctr"/>
           <a:lstStyle/>
           <a:p>
             <a:pPr algn="ctr"/>
@@ -6066,10 +6422,16 @@
                 <a:solidFill>
                   <a:srgbClr val="64748B"/>
                 </a:solidFill>
-                <a:latin typeface="Microsoft YaHei"/>
+                <a:latin typeface="微软雅黑" panose="020B0503020204020204" charset="-122"/>
               </a:rPr>
               <a:t>📷 IMG-P08 执行状态卡片 + 风险评分 + 执行日志</a:t>
             </a:r>
+            <a:endParaRPr sz="1500">
+              <a:solidFill>
+                <a:srgbClr val="64748B"/>
+              </a:solidFill>
+              <a:latin typeface="微软雅黑" panose="020B0503020204020204" charset="-122"/>
+            </a:endParaRPr>
           </a:p>
         </p:txBody>
       </p:sp>
@@ -6101,10 +6463,16 @@
                 <a:solidFill>
                   <a:srgbClr val="64748B"/>
                 </a:solidFill>
-                <a:latin typeface="Microsoft YaHei"/>
+                <a:latin typeface="微软雅黑" panose="020B0503020204020204" charset="-122"/>
               </a:rPr>
               <a:t>08/13</a:t>
             </a:r>
+            <a:endParaRPr sz="1100" b="0">
+              <a:solidFill>
+                <a:srgbClr val="64748B"/>
+              </a:solidFill>
+              <a:latin typeface="微软雅黑" panose="020B0503020204020204" charset="-122"/>
+            </a:endParaRPr>
           </a:p>
         </p:txBody>
       </p:sp>
@@ -6117,7 +6485,7 @@
 </file>
 
 <file path=ppt/slides/slide9.xml><?xml version="1.0" encoding="utf-8"?>
-<p:sld xmlns:a="http://schemas.openxmlformats.org/drawingml/2006/main" xmlns:p="http://schemas.openxmlformats.org/presentationml/2006/main" xmlns:r="http://schemas.openxmlformats.org/officeDocument/2006/relationships">
+<p:sld xmlns:a="http://schemas.openxmlformats.org/drawingml/2006/main" xmlns:r="http://schemas.openxmlformats.org/officeDocument/2006/relationships" xmlns:p="http://schemas.openxmlformats.org/presentationml/2006/main">
   <p:cSld>
     <p:bg>
       <p:bgPr>
@@ -6162,10 +6530,16 @@
                 <a:solidFill>
                   <a:srgbClr val="06B6D4"/>
                 </a:solidFill>
-                <a:latin typeface="Microsoft YaHei"/>
+                <a:latin typeface="微软雅黑" panose="020B0503020204020204" charset="-122"/>
               </a:rPr>
               <a:t>成果 · Vue3 + ECharts</a:t>
             </a:r>
+            <a:endParaRPr sz="1300" b="1">
+              <a:solidFill>
+                <a:srgbClr val="06B6D4"/>
+              </a:solidFill>
+              <a:latin typeface="微软雅黑" panose="020B0503020204020204" charset="-122"/>
+            </a:endParaRPr>
           </a:p>
         </p:txBody>
       </p:sp>
@@ -6197,10 +6571,16 @@
                 <a:solidFill>
                   <a:srgbClr val="F8FAFC"/>
                 </a:solidFill>
-                <a:latin typeface="Microsoft YaHei"/>
+                <a:latin typeface="微软雅黑" panose="020B0503020204020204" charset="-122"/>
               </a:rPr>
               <a:t>C 端 · Web 管理面板</a:t>
             </a:r>
+            <a:endParaRPr sz="3000" b="1">
+              <a:solidFill>
+                <a:srgbClr val="F8FAFC"/>
+              </a:solidFill>
+              <a:latin typeface="微软雅黑" panose="020B0503020204020204" charset="-122"/>
+            </a:endParaRPr>
           </a:p>
         </p:txBody>
       </p:sp>
@@ -6279,7 +6659,7 @@
                 <a:solidFill>
                   <a:srgbClr val="06B6D4"/>
                 </a:solidFill>
-                <a:latin typeface="Microsoft YaHei"/>
+                <a:latin typeface="微软雅黑" panose="020B0503020204020204" charset="-122"/>
               </a:rPr>
               <a:t>▪ </a:t>
             </a:r>
@@ -6288,10 +6668,16 @@
                 <a:solidFill>
                   <a:srgbClr val="F8FAFC"/>
                 </a:solidFill>
-                <a:latin typeface="Microsoft YaHei"/>
+                <a:latin typeface="微软雅黑" panose="020B0503020204020204" charset="-122"/>
               </a:rPr>
               <a:t>Vue3 + Vite + Element Plus + ECharts + Pinia</a:t>
             </a:r>
+            <a:endParaRPr sz="1700">
+              <a:solidFill>
+                <a:srgbClr val="F8FAFC"/>
+              </a:solidFill>
+              <a:latin typeface="微软雅黑" panose="020B0503020204020204" charset="-122"/>
+            </a:endParaRPr>
           </a:p>
           <a:p>
             <a:pPr>
@@ -6304,7 +6690,7 @@
                 <a:solidFill>
                   <a:srgbClr val="06B6D4"/>
                 </a:solidFill>
-                <a:latin typeface="Microsoft YaHei"/>
+                <a:latin typeface="微软雅黑" panose="020B0503020204020204" charset="-122"/>
               </a:rPr>
               <a:t>▪ </a:t>
             </a:r>
@@ -6313,10 +6699,16 @@
                 <a:solidFill>
                   <a:srgbClr val="F8FAFC"/>
                 </a:solidFill>
-                <a:latin typeface="Microsoft YaHei"/>
+                <a:latin typeface="微软雅黑" panose="020B0503020204020204" charset="-122"/>
               </a:rPr>
               <a:t>6 页：登录/总览/失败归因/数据流/配置/健康</a:t>
             </a:r>
+            <a:endParaRPr sz="1700">
+              <a:solidFill>
+                <a:srgbClr val="F8FAFC"/>
+              </a:solidFill>
+              <a:latin typeface="微软雅黑" panose="020B0503020204020204" charset="-122"/>
+            </a:endParaRPr>
           </a:p>
           <a:p>
             <a:pPr>
@@ -6329,7 +6721,7 @@
                 <a:solidFill>
                   <a:srgbClr val="06B6D4"/>
                 </a:solidFill>
-                <a:latin typeface="Microsoft YaHei"/>
+                <a:latin typeface="微软雅黑" panose="020B0503020204020204" charset="-122"/>
               </a:rPr>
               <a:t>▪ </a:t>
             </a:r>
@@ -6338,10 +6730,16 @@
                 <a:solidFill>
                   <a:srgbClr val="F8FAFC"/>
                 </a:solidFill>
-                <a:latin typeface="Microsoft YaHei"/>
+                <a:latin typeface="微软雅黑" panose="020B0503020204020204" charset="-122"/>
               </a:rPr>
               <a:t>总览：5 KPI + 反馈饼图 + L2/L3 + 24h 趋势</a:t>
             </a:r>
+            <a:endParaRPr sz="1700">
+              <a:solidFill>
+                <a:srgbClr val="F8FAFC"/>
+              </a:solidFill>
+              <a:latin typeface="微软雅黑" panose="020B0503020204020204" charset="-122"/>
+            </a:endParaRPr>
           </a:p>
           <a:p>
             <a:pPr>
@@ -6354,7 +6752,7 @@
                 <a:solidFill>
                   <a:srgbClr val="06B6D4"/>
                 </a:solidFill>
-                <a:latin typeface="Microsoft YaHei"/>
+                <a:latin typeface="微软雅黑" panose="020B0503020204020204" charset="-122"/>
               </a:rPr>
               <a:t>▪ </a:t>
             </a:r>
@@ -6363,10 +6761,16 @@
                 <a:solidFill>
                   <a:srgbClr val="F8FAFC"/>
                 </a:solidFill>
-                <a:latin typeface="Microsoft YaHei"/>
+                <a:latin typeface="微软雅黑" panose="020B0503020204020204" charset="-122"/>
               </a:rPr>
               <a:t>失败归因下钻单任务 + LLM 快照</a:t>
             </a:r>
+            <a:endParaRPr sz="1700">
+              <a:solidFill>
+                <a:srgbClr val="F8FAFC"/>
+              </a:solidFill>
+              <a:latin typeface="微软雅黑" panose="020B0503020204020204" charset="-122"/>
+            </a:endParaRPr>
           </a:p>
           <a:p>
             <a:pPr>
@@ -6379,7 +6783,7 @@
                 <a:solidFill>
                   <a:srgbClr val="06B6D4"/>
                 </a:solidFill>
-                <a:latin typeface="Microsoft YaHei"/>
+                <a:latin typeface="微软雅黑" panose="020B0503020204020204" charset="-122"/>
               </a:rPr>
               <a:t>▪ </a:t>
             </a:r>
@@ -6388,10 +6792,16 @@
                 <a:solidFill>
                   <a:srgbClr val="F8FAFC"/>
                 </a:solidFill>
-                <a:latin typeface="Microsoft YaHei"/>
+                <a:latin typeface="微软雅黑" panose="020B0503020204020204" charset="-122"/>
               </a:rPr>
               <a:t>配置热部署 · 健康告警 · CSV 导出</a:t>
             </a:r>
+            <a:endParaRPr sz="1700">
+              <a:solidFill>
+                <a:srgbClr val="F8FAFC"/>
+              </a:solidFill>
+              <a:latin typeface="微软雅黑" panose="020B0503020204020204" charset="-122"/>
+            </a:endParaRPr>
           </a:p>
         </p:txBody>
       </p:sp>
@@ -6434,7 +6844,7 @@
           </a:fontRef>
         </p:style>
         <p:txBody>
-          <a:bodyPr rtlCol="0" anchor="ctr" wrap="square"/>
+          <a:bodyPr wrap="square" rtlCol="0" anchor="ctr"/>
           <a:lstStyle/>
           <a:p>
             <a:pPr algn="ctr"/>
@@ -6443,10 +6853,16 @@
                 <a:solidFill>
                   <a:srgbClr val="64748B"/>
                 </a:solidFill>
-                <a:latin typeface="Microsoft YaHei"/>
+                <a:latin typeface="微软雅黑" panose="020B0503020204020204" charset="-122"/>
               </a:rPr>
               <a:t>📷 IMG-P09 总览 / 失败归因 / 数据流 三页拼图</a:t>
             </a:r>
+            <a:endParaRPr sz="1500">
+              <a:solidFill>
+                <a:srgbClr val="64748B"/>
+              </a:solidFill>
+              <a:latin typeface="微软雅黑" panose="020B0503020204020204" charset="-122"/>
+            </a:endParaRPr>
           </a:p>
         </p:txBody>
       </p:sp>
@@ -6478,10 +6894,16 @@
                 <a:solidFill>
                   <a:srgbClr val="64748B"/>
                 </a:solidFill>
-                <a:latin typeface="Microsoft YaHei"/>
+                <a:latin typeface="微软雅黑" panose="020B0503020204020204" charset="-122"/>
               </a:rPr>
               <a:t>09/13</a:t>
             </a:r>
+            <a:endParaRPr sz="1100" b="0">
+              <a:solidFill>
+                <a:srgbClr val="64748B"/>
+              </a:solidFill>
+              <a:latin typeface="微软雅黑" panose="020B0503020204020204" charset="-122"/>
+            </a:endParaRPr>
           </a:p>
         </p:txBody>
       </p:sp>
@@ -6809,6 +7231,10 @@
       </a:style>
     </a:lnDef>
   </a:objectDefaults>
-  <a:extraClrSchemeLst/>
+  <a:extLst>
+    <a:ext uri="{05A4C25C-085E-4340-85A3-A5531E510DB2}">
+      <thm15:themeFamily xmlns:thm15="http://schemas.microsoft.com/office/thememl/2012/main" name="Office Theme" id="{62F939B6-93AF-4DB8-9C6B-D6C7DFDC589F}" vid="{4A3C46E8-61CC-4603-A589-7422A47A8E4A}"/>
+    </a:ext>
+  </a:extLst>
 </a:theme>
 </file>